--- a/lecons/F2T/18_S12_L4_P3_Temperate_Farming.pptx
+++ b/lecons/F2T/18_S12_L4_P3_Temperate_Farming.pptx
@@ -56,9 +56,11 @@
     <p:sldId id="304" r:id="rId50"/>
     <p:sldId id="305" r:id="rId51"/>
     <p:sldId id="306" r:id="rId52"/>
+    <p:sldId id="307" r:id="rId53"/>
+    <p:sldId id="308" r:id="rId54"/>
   </p:sldIdLst>
   <p:notesMasterIdLst>
-    <p:notesMasterId r:id="rId53"/>
+    <p:notesMasterId r:id="rId55"/>
   </p:notesMasterIdLst>
   <p:sldSz cx="12192000" cy="6858000"/>
   <p:notesSz cx="6858000" cy="12192000"/>
@@ -640,7 +642,7 @@
           <a:p>
             <a:r>
               <a:rPr lang="en-US" dirty="0"/>
-              <a:t>Listen carefully to this situation from real life. In a shop in Garoua, Blaise sees wheat flour from France, milk powder from the Netherlands and olive oil from Spain. He wonders how these countries produce so much food. Think about it, because I am going to ask you some questions.</a:t>
+              <a:t>Listen carefully to this situation from real life. In a shop in Garoua, Blaise sees wheat flour from France, milk powder from the Netherlands and olive oil from Spain. Blaise asks: "How do these countries produce so much food?" Think about it, because I am going to ask you some questions.</a:t>
             </a:r>
             <a:endParaRPr lang="en-US" dirty="0"/>
           </a:p>
@@ -816,7 +818,7 @@
           <a:p>
             <a:r>
               <a:rPr lang="en-US" dirty="0"/>
-              <a:t>Good. Blaise does not know how these countries produce so much food.</a:t>
+              <a:t>Good. Blaise does not know the types of farming in the temperate region.</a:t>
             </a:r>
             <a:endParaRPr lang="en-US" dirty="0"/>
           </a:p>
@@ -904,7 +906,7 @@
           <a:p>
             <a:r>
               <a:rPr lang="en-US" dirty="0"/>
-              <a:t>Question 2: Name the three products and their countries. Think for a moment, then raise your hand to answer.</a:t>
+              <a:t>Question 2: Name one product from France. Think for a moment, then raise your hand to answer.</a:t>
             </a:r>
             <a:endParaRPr lang="en-US" dirty="0"/>
           </a:p>
@@ -992,7 +994,7 @@
           <a:p>
             <a:r>
               <a:rPr lang="en-US" dirty="0"/>
-              <a:t>Good. Flour (France), milk (Netherlands), olive oil (Spain).</a:t>
+              <a:t>Good. Wheat flour.</a:t>
             </a:r>
             <a:endParaRPr lang="en-US" dirty="0"/>
           </a:p>
@@ -1080,7 +1082,7 @@
           <a:p>
             <a:r>
               <a:rPr lang="en-US" dirty="0"/>
-              <a:t>Question 3: What helps these farmers to produce a lot? Think for a moment, then raise your hand to answer.</a:t>
+              <a:t>Question 3: Name one product from the Netherlands. Think for a moment, then raise your hand to answer.</a:t>
             </a:r>
             <a:endParaRPr lang="en-US" dirty="0"/>
           </a:p>
@@ -1168,7 +1170,7 @@
           <a:p>
             <a:r>
               <a:rPr lang="en-US" dirty="0"/>
-              <a:t>Good. Machines, good seeds and fertilisers.</a:t>
+              <a:t>Good. Milk powder.</a:t>
             </a:r>
             <a:endParaRPr lang="en-US" dirty="0"/>
           </a:p>
@@ -1432,7 +1434,7 @@
           <a:p>
             <a:r>
               <a:rPr lang="en-US" dirty="0"/>
-              <a:t>Activity 1. Look carefully at this picture: cows on a farm with fields. Observe every detail before I ask the question.</a:t>
+              <a:t>Activity 1. Look carefully at this picture: crops and animals on one farm. Observe every detail before I ask the question.</a:t>
             </a:r>
             <a:endParaRPr lang="en-US" dirty="0"/>
           </a:p>
@@ -1608,7 +1610,7 @@
           <a:p>
             <a:r>
               <a:rPr lang="en-US" dirty="0"/>
-              <a:t>Here is the question for Activity 1: This farmer grows crops and rears animals on the same farm. What is this type of farming? Take one minute to think and write your answer in your rough notebook.</a:t>
+              <a:t>Here is the question for Activity 1: What is this type of farming called? Take one minute to think and write your answer in your rough notebook.</a:t>
             </a:r>
             <a:endParaRPr lang="en-US" dirty="0"/>
           </a:p>
@@ -1784,7 +1786,7 @@
           <a:p>
             <a:r>
               <a:rPr lang="en-US" dirty="0"/>
-              <a:t>Activity 2. Look carefully at this picture: cows on a farm in the Netherlands. Observe every detail before I ask the question.</a:t>
+              <a:t>Activity 2. Look carefully at this picture: cows reared for milk. Observe every detail before I ask the question.</a:t>
             </a:r>
             <a:endParaRPr lang="en-US" dirty="0"/>
           </a:p>
@@ -1872,7 +1874,7 @@
           <a:p>
             <a:r>
               <a:rPr lang="en-US" dirty="0"/>
-              <a:t>Here is the question for Activity 2: These cows are reared for milk, butter and cheese. What is this type of farming? Take one minute to think and write your answer in your rough notebook.</a:t>
+              <a:t>Here is the question for Activity 2: What is the rearing of cows for milk called? Take one minute to think and write your answer in your rough notebook.</a:t>
             </a:r>
             <a:endParaRPr lang="en-US" dirty="0"/>
           </a:p>
@@ -2048,7 +2050,7 @@
           <a:p>
             <a:r>
               <a:rPr lang="en-US" dirty="0"/>
-              <a:t>Activity 3. Look carefully at this picture: a big machine harvests wheat. Observe every detail before I ask the question.</a:t>
+              <a:t>Activity 3. Look carefully at this picture: a machine harvests wheat. Observe every detail before I ask the question.</a:t>
             </a:r>
             <a:endParaRPr lang="en-US" dirty="0"/>
           </a:p>
@@ -2312,7 +2314,7 @@
           <a:p>
             <a:r>
               <a:rPr lang="en-US" dirty="0"/>
-              <a:t>Activity 4. Look carefully at this picture: a farmer with his sheep. Observe every detail before I ask the question.</a:t>
+              <a:t>Activity 4. Look carefully at this picture: sheep on a huge farm. Observe every detail before I ask the question.</a:t>
             </a:r>
             <a:endParaRPr lang="en-US" dirty="0"/>
           </a:p>
@@ -2400,7 +2402,7 @@
           <a:p>
             <a:r>
               <a:rPr lang="en-US" dirty="0"/>
-              <a:t>Here is the question for Activity 4: In Australia, sheep are reared on huge farms. What are these farms called? Take one minute to think and write your answer in your rough notebook.</a:t>
+              <a:t>Here is the question for Activity 4: What are huge animal farms called? Take one minute to think and write your answer in your rough notebook.</a:t>
             </a:r>
             <a:endParaRPr lang="en-US" dirty="0"/>
           </a:p>
@@ -2664,7 +2666,7 @@
           <a:p>
             <a:r>
               <a:rPr lang="en-US" dirty="0"/>
-              <a:t>Activity 5. Look carefully at this picture: picking grapes in France. Observe every detail before I ask the question.</a:t>
+              <a:t>Activity 5. Look carefully at this picture: a vineyard. Observe every detail before I ask the question.</a:t>
             </a:r>
             <a:endParaRPr lang="en-US" dirty="0"/>
           </a:p>
@@ -2752,7 +2754,7 @@
           <a:p>
             <a:r>
               <a:rPr lang="en-US" dirty="0"/>
-              <a:t>Here is the question for Activity 5: Name two crops of Mediterranean farming. Take one minute to think and write your answer in your rough notebook.</a:t>
+              <a:t>Here is the question for Activity 5: Name one crop of Mediterranean farming. Take one minute to think and write your answer in your rough notebook.</a:t>
             </a:r>
             <a:endParaRPr lang="en-US" dirty="0"/>
           </a:p>
@@ -2840,7 +2842,7 @@
           <a:p>
             <a:r>
               <a:rPr lang="en-US" dirty="0"/>
-              <a:t>Let us check the answer together. Grapes and olives (also oranges and wheat).</a:t>
+              <a:t>Let us check the answer together. Grapes (also olives and oranges).</a:t>
             </a:r>
             <a:endParaRPr lang="en-US" dirty="0"/>
           </a:p>
@@ -3016,7 +3018,7 @@
           <a:p>
             <a:r>
               <a:rPr lang="en-US" dirty="0"/>
-              <a:t>Let us copy Types of Farming. The main types of farming in the temperate region are the following. On this slide we have Mixed farming. Write each point on a new line, with the key term first, and explain it in your own words when we revise. When you finish, we go to the next slide.</a:t>
+              <a:t>Let us copy the definitions. The key terms of this lesson are defined as follows. On this slide we have Mixed farming and Mechanisation. Write each point on a new line, with the key term first, and explain it in your own words when we revise.</a:t>
             </a:r>
             <a:endParaRPr lang="en-US" dirty="0"/>
           </a:p>
@@ -3104,7 +3106,7 @@
           <a:p>
             <a:r>
               <a:rPr lang="en-US" dirty="0"/>
-              <a:t>We continue with Types of Farming. On this slide we have Dairy farming and Grain farming. Write each point on a new line, with the key term first, and explain it in your own words when we revise. When you finish, we go to the next slide.</a:t>
+              <a:t>Let us copy Farming in the Temperate Region. The main types of farming are the following. Copy the point on Mixed farming on the left, then draw the diagram on the right: mixed farming. Give it a title and label it clearly.</a:t>
             </a:r>
             <a:endParaRPr lang="en-US" dirty="0"/>
           </a:p>
@@ -3192,7 +3194,7 @@
           <a:p>
             <a:r>
               <a:rPr lang="en-US" dirty="0"/>
-              <a:t>We continue with Types of Farming. On this slide we have Ranching and Mediterranean farming. Write each point on a new line, with the key term first, and explain it in your own words when we revise.</a:t>
+              <a:t>Copy the point on Dairy farming on the left, then draw the diagram on the right: dairy farming. Give it a title and label it clearly.</a:t>
             </a:r>
             <a:endParaRPr lang="en-US" dirty="0"/>
           </a:p>
@@ -3280,7 +3282,7 @@
           <a:p>
             <a:r>
               <a:rPr lang="en-US" dirty="0"/>
-              <a:t>Let us copy Characteristics of Temperate Farming. Farming in the temperate region has the following characteristics. On this slide we have Machines and Science. Write each point on a new line, with the key term first, and explain it in your own words when we revise. When you finish, we go to the next slide.</a:t>
+              <a:t>Copy the point on Wheat farming on the left, then draw the diagram on the right: harvesting wheat. Give it a title and label it clearly.</a:t>
             </a:r>
             <a:endParaRPr lang="en-US" dirty="0"/>
           </a:p>
@@ -3368,7 +3370,7 @@
           <a:p>
             <a:r>
               <a:rPr lang="en-US" dirty="0"/>
-              <a:t>We continue with Characteristics of Temperate Farming. On this slide we have Trade. Write each point on a new line, with the key term first, and explain it in your own words when we revise.</a:t>
+              <a:t>We continue with Farming in the Temperate Region. On this slide we have Ranching. Write each point on a new line, with the key term first, and explain it in your own words when we revise.</a:t>
             </a:r>
             <a:endParaRPr lang="en-US" dirty="0"/>
           </a:p>
@@ -3544,7 +3546,7 @@
           <a:p>
             <a:r>
               <a:rPr lang="en-US" dirty="0"/>
-              <a:t>Now let us check what you have understood. Question 1: What is mixed farming? Answer in your exercise book.</a:t>
+              <a:t>Copy the point on Mediterranean farming on the left, then draw the diagram on the right: a vineyard. Give it a title and label it clearly.</a:t>
             </a:r>
             <a:endParaRPr lang="en-US" dirty="0"/>
           </a:p>
@@ -3632,7 +3634,7 @@
           <a:p>
             <a:r>
               <a:rPr lang="en-US" dirty="0"/>
-              <a:t>The expected answer is: growing crops and rearing animals on the same farm. If you got it right, well done.</a:t>
+              <a:t>We continue with Farming in the Temperate Region. On this slide we have Why it is productive. Write each point on a new line, with the key term first, and explain it in your own words when we revise.</a:t>
             </a:r>
             <a:endParaRPr lang="en-US" dirty="0"/>
           </a:p>
@@ -3720,7 +3722,7 @@
           <a:p>
             <a:r>
               <a:rPr lang="en-US" dirty="0"/>
-              <a:t>Now let us check what you have understood. Question 2: Why do temperate farmers produce a lot? Answer in your exercise book.</a:t>
+              <a:t>Now let us check what you have understood. Question 1: What is mixed farming? Answer in your exercise book.</a:t>
             </a:r>
             <a:endParaRPr lang="en-US" dirty="0"/>
           </a:p>
@@ -3808,7 +3810,7 @@
           <a:p>
             <a:r>
               <a:rPr lang="en-US" dirty="0"/>
-              <a:t>The expected answer is: they use machines, good seeds and fertilisers. If you got it right, well done.</a:t>
+              <a:t>The expected answer is: growing crops and rearing animals on the same farm. If you got it right, well done.</a:t>
             </a:r>
             <a:endParaRPr lang="en-US" dirty="0"/>
           </a:p>
@@ -3896,7 +3898,7 @@
           <a:p>
             <a:r>
               <a:rPr lang="en-US" dirty="0"/>
-              <a:t>For those who need more practice, fill in the blanks in your exercise book. The answers are: number 1, dairy; number 2, ranch; number 3, machine (combine harvester).</a:t>
+              <a:t>Now let us check what you have understood. Question 2: Why do temperate farmers produce a lot? Answer in your exercise book.</a:t>
             </a:r>
             <a:endParaRPr lang="en-US" dirty="0"/>
           </a:p>
@@ -3984,7 +3986,7 @@
           <a:p>
             <a:r>
               <a:rPr lang="en-US" dirty="0"/>
-              <a:t>For your homework: Ask an adult who has lived or travelled in Europe what difficulties people face in winter. Write down two of them. We shall correct it at the beginning of our next lesson.</a:t>
+              <a:t>The expected answer is: they use machines, good seeds and fertilisers. If you got it right, well done.</a:t>
             </a:r>
             <a:endParaRPr lang="en-US" dirty="0"/>
           </a:p>
@@ -4072,7 +4074,7 @@
           <a:p>
             <a:r>
               <a:rPr lang="en-US" dirty="0"/>
-              <a:t>Our next lesson will be on Lesson 4 (Part 4): The Temperate Region: Problems Faced and Adaptations. Thank you for your attention, and see you next time.</a:t>
+              <a:t>For those who need more practice, fill in the blanks in your exercise book. The answers are: number 1, dairy; number 2, ranch; number 3, machine (combine harvester).</a:t>
             </a:r>
             <a:endParaRPr lang="en-US" dirty="0"/>
           </a:p>
@@ -4160,7 +4162,7 @@
           <a:p>
             <a:r>
               <a:rPr lang="en-US" dirty="0"/>
-              <a:t>Let us play the bilingual game. I say a word in English, and you give me the French word. Then we do the reverse.</a:t>
+              <a:t>For your homework: Ask an adult who has lived or travelled in Europe what difficulties people face in winter. Write down two of them. We shall correct it at the beginning of our next lesson.</a:t>
             </a:r>
             <a:endParaRPr lang="en-US" dirty="0"/>
           </a:p>
@@ -4248,7 +4250,7 @@
           <a:p>
             <a:r>
               <a:rPr lang="en-US" dirty="0"/>
-              <a:t>I record this information in the official logbook of the class after the lesson.</a:t>
+              <a:t>Our next lesson will be on Lesson 4 (Part 4): The Temperate Region: Problems Faced and Adaptations. Thank you for your attention, and see you next time.</a:t>
             </a:r>
             <a:endParaRPr lang="en-US" dirty="0"/>
           </a:p>
@@ -4336,7 +4338,7 @@
           <a:p>
             <a:r>
               <a:rPr lang="en-US" dirty="0"/>
-              <a:t>I complete the second page of the logbook: the matter taught, the evaluation, the homework and the attendance.</a:t>
+              <a:t>Let us play the bilingual game. I say a word in English, and you give me the French word. Then we do the reverse.</a:t>
             </a:r>
             <a:endParaRPr lang="en-US" dirty="0"/>
           </a:p>
@@ -4512,7 +4514,7 @@
           <a:p>
             <a:r>
               <a:rPr lang="en-US" dirty="0"/>
-              <a:t>This slide is for me, the teacher: it gives the timing of the lesson and what to do if the projector is not available.</a:t>
+              <a:t>I record this information in the official logbook of the class after the lesson.</a:t>
             </a:r>
             <a:endParaRPr lang="en-US" dirty="0"/>
           </a:p>
@@ -4600,7 +4602,7 @@
           <a:p>
             <a:r>
               <a:rPr lang="en-US" dirty="0"/>
-              <a:t>These are the references and picture credits used to prepare this lesson.</a:t>
+              <a:t>I complete the second page of the logbook: the matter taught, the evaluation, the homework and the attendance.</a:t>
             </a:r>
             <a:endParaRPr lang="en-US" dirty="0"/>
           </a:p>
@@ -4624,6 +4626,182 @@
             <a:fld id="{F7021451-1387-4CA6-816F-3879F97B5CBC}" type="slidenum">
               <a:rPr lang="en-US"/>
               <a:t>51</a:t>
+            </a:fld>
+            <a:endParaRPr lang="en-US"/>
+          </a:p>
+        </p:txBody>
+      </p:sp>
+    </p:spTree>
+    <p:extLst>
+      <p:ext uri="{BB962C8B-B14F-4D97-AF65-F5344CB8AC3E}">
+        <p14:creationId xmlns:p14="http://schemas.microsoft.com/office/powerpoint/2010/main" val="1024086991"/>
+      </p:ext>
+    </p:extLst>
+  </p:cSld>
+  <p:clrMapOvr>
+    <a:masterClrMapping/>
+  </p:clrMapOvr>
+</p:notes>
+</file>
+
+<file path=ppt/notesSlides/notesSlide52.xml><?xml version="1.0" encoding="utf-8"?>
+<p:notes xmlns:a="http://schemas.openxmlformats.org/drawingml/2006/main" xmlns:r="http://schemas.openxmlformats.org/officeDocument/2006/relationships" xmlns:p="http://schemas.openxmlformats.org/presentationml/2006/main">
+  <p:cSld>
+    <p:spTree>
+      <p:nvGrpSpPr>
+        <p:cNvPr id="1" name=""/>
+        <p:cNvGrpSpPr/>
+        <p:nvPr/>
+      </p:nvGrpSpPr>
+      <p:grpSpPr>
+        <a:xfrm>
+          <a:off x="0" y="0"/>
+          <a:ext cx="0" cy="0"/>
+          <a:chOff x="0" y="0"/>
+          <a:chExt cx="0" cy="0"/>
+        </a:xfrm>
+      </p:grpSpPr>
+      <p:sp>
+        <p:nvSpPr>
+          <p:cNvPr id="2" name="Slide Image Placeholder 1"/>
+          <p:cNvSpPr>
+            <a:spLocks noGrp="1" noRot="1" noChangeAspect="1"/>
+          </p:cNvSpPr>
+          <p:nvPr>
+            <p:ph type="sldImg"/>
+          </p:nvPr>
+        </p:nvSpPr>
+        <p:spPr/>
+      </p:sp>
+      <p:sp>
+        <p:nvSpPr>
+          <p:cNvPr id="3" name="Notes Placeholder 2"/>
+          <p:cNvSpPr>
+            <a:spLocks noGrp="1"/>
+          </p:cNvSpPr>
+          <p:nvPr>
+            <p:ph type="body" idx="1"/>
+          </p:nvPr>
+        </p:nvSpPr>
+        <p:spPr/>
+        <p:txBody>
+          <a:bodyPr/>
+          <a:lstStyle/>
+          <a:p>
+            <a:r>
+              <a:rPr lang="en-US" dirty="0"/>
+              <a:t>This slide is for me, the teacher: it gives the timing of the lesson and what to do if the projector is not available.</a:t>
+            </a:r>
+            <a:endParaRPr lang="en-US" dirty="0"/>
+          </a:p>
+        </p:txBody>
+      </p:sp>
+      <p:sp>
+        <p:nvSpPr>
+          <p:cNvPr id="4" name="Slide Number Placeholder 3"/>
+          <p:cNvSpPr>
+            <a:spLocks noGrp="1"/>
+          </p:cNvSpPr>
+          <p:nvPr>
+            <p:ph type="sldNum" sz="quarter" idx="10"/>
+          </p:nvPr>
+        </p:nvSpPr>
+        <p:spPr/>
+        <p:txBody>
+          <a:bodyPr/>
+          <a:lstStyle/>
+          <a:p>
+            <a:fld id="{F7021451-1387-4CA6-816F-3879F97B5CBC}" type="slidenum">
+              <a:rPr lang="en-US"/>
+              <a:t>52</a:t>
+            </a:fld>
+            <a:endParaRPr lang="en-US"/>
+          </a:p>
+        </p:txBody>
+      </p:sp>
+    </p:spTree>
+    <p:extLst>
+      <p:ext uri="{BB962C8B-B14F-4D97-AF65-F5344CB8AC3E}">
+        <p14:creationId xmlns:p14="http://schemas.microsoft.com/office/powerpoint/2010/main" val="1024086991"/>
+      </p:ext>
+    </p:extLst>
+  </p:cSld>
+  <p:clrMapOvr>
+    <a:masterClrMapping/>
+  </p:clrMapOvr>
+</p:notes>
+</file>
+
+<file path=ppt/notesSlides/notesSlide53.xml><?xml version="1.0" encoding="utf-8"?>
+<p:notes xmlns:a="http://schemas.openxmlformats.org/drawingml/2006/main" xmlns:r="http://schemas.openxmlformats.org/officeDocument/2006/relationships" xmlns:p="http://schemas.openxmlformats.org/presentationml/2006/main">
+  <p:cSld>
+    <p:spTree>
+      <p:nvGrpSpPr>
+        <p:cNvPr id="1" name=""/>
+        <p:cNvGrpSpPr/>
+        <p:nvPr/>
+      </p:nvGrpSpPr>
+      <p:grpSpPr>
+        <a:xfrm>
+          <a:off x="0" y="0"/>
+          <a:ext cx="0" cy="0"/>
+          <a:chOff x="0" y="0"/>
+          <a:chExt cx="0" cy="0"/>
+        </a:xfrm>
+      </p:grpSpPr>
+      <p:sp>
+        <p:nvSpPr>
+          <p:cNvPr id="2" name="Slide Image Placeholder 1"/>
+          <p:cNvSpPr>
+            <a:spLocks noGrp="1" noRot="1" noChangeAspect="1"/>
+          </p:cNvSpPr>
+          <p:nvPr>
+            <p:ph type="sldImg"/>
+          </p:nvPr>
+        </p:nvSpPr>
+        <p:spPr/>
+      </p:sp>
+      <p:sp>
+        <p:nvSpPr>
+          <p:cNvPr id="3" name="Notes Placeholder 2"/>
+          <p:cNvSpPr>
+            <a:spLocks noGrp="1"/>
+          </p:cNvSpPr>
+          <p:nvPr>
+            <p:ph type="body" idx="1"/>
+          </p:nvPr>
+        </p:nvSpPr>
+        <p:spPr/>
+        <p:txBody>
+          <a:bodyPr/>
+          <a:lstStyle/>
+          <a:p>
+            <a:r>
+              <a:rPr lang="en-US" dirty="0"/>
+              <a:t>These are the references and picture credits used to prepare this lesson.</a:t>
+            </a:r>
+            <a:endParaRPr lang="en-US" dirty="0"/>
+          </a:p>
+        </p:txBody>
+      </p:sp>
+      <p:sp>
+        <p:nvSpPr>
+          <p:cNvPr id="4" name="Slide Number Placeholder 3"/>
+          <p:cNvSpPr>
+            <a:spLocks noGrp="1"/>
+          </p:cNvSpPr>
+          <p:nvPr>
+            <p:ph type="sldNum" sz="quarter" idx="10"/>
+          </p:nvPr>
+        </p:nvSpPr>
+        <p:spPr/>
+        <p:txBody>
+          <a:bodyPr/>
+          <a:lstStyle/>
+          <a:p>
+            <a:fld id="{F7021451-1387-4CA6-816F-3879F97B5CBC}" type="slidenum">
+              <a:rPr lang="en-US"/>
+              <a:t>53</a:t>
             </a:fld>
             <a:endParaRPr lang="en-US"/>
           </a:p>
@@ -6416,7 +6594,7 @@
                 <a:ea typeface="Times New Roman" pitchFamily="34" charset="-122"/>
                 <a:cs typeface="Times New Roman" pitchFamily="34" charset="-120"/>
               </a:rPr>
-              <a:t>In a shop in Garoua, Blaise sees wheat flour from France, milk powder from the Netherlands and olive oil from Spain. He wonders how these countries produce so much food.</a:t>
+              <a:t>In a shop in Garoua, Blaise sees wheat flour from France, milk powder from the Netherlands and olive oil from Spain. Blaise asks: "How do these countries produce so much food?"</a:t>
             </a:r>
             <a:endParaRPr lang="en-US" sz="4000" dirty="0"/>
           </a:p>
@@ -6854,7 +7032,7 @@
                 <a:ea typeface="Times New Roman" pitchFamily="34" charset="-122"/>
                 <a:cs typeface="Times New Roman" pitchFamily="34" charset="-120"/>
               </a:rPr>
-              <a:t>Blaise does not know how these countries produce so much food.</a:t>
+              <a:t>Blaise does not know the types of farming in the temperate region.</a:t>
             </a:r>
             <a:endParaRPr lang="en-US" sz="4000" dirty="0"/>
           </a:p>
@@ -7073,7 +7251,7 @@
                 <a:ea typeface="Times New Roman" pitchFamily="34" charset="-122"/>
                 <a:cs typeface="Times New Roman" pitchFamily="34" charset="-120"/>
               </a:rPr>
-              <a:t>Name the three products and their countries.</a:t>
+              <a:t>Name one product from France.</a:t>
             </a:r>
             <a:endParaRPr lang="en-US" sz="4000" dirty="0"/>
           </a:p>
@@ -7292,7 +7470,7 @@
                 <a:ea typeface="Times New Roman" pitchFamily="34" charset="-122"/>
                 <a:cs typeface="Times New Roman" pitchFamily="34" charset="-120"/>
               </a:rPr>
-              <a:t>Flour (France), milk (Netherlands), olive oil (Spain).</a:t>
+              <a:t>Wheat flour.</a:t>
             </a:r>
             <a:endParaRPr lang="en-US" sz="4000" dirty="0"/>
           </a:p>
@@ -7511,7 +7689,7 @@
                 <a:ea typeface="Times New Roman" pitchFamily="34" charset="-122"/>
                 <a:cs typeface="Times New Roman" pitchFamily="34" charset="-120"/>
               </a:rPr>
-              <a:t>What helps these farmers to produce a lot?</a:t>
+              <a:t>Name one product from the Netherlands.</a:t>
             </a:r>
             <a:endParaRPr lang="en-US" sz="4000" dirty="0"/>
           </a:p>
@@ -7730,7 +7908,7 @@
                 <a:ea typeface="Times New Roman" pitchFamily="34" charset="-122"/>
                 <a:cs typeface="Times New Roman" pitchFamily="34" charset="-120"/>
               </a:rPr>
-              <a:t>Machines, good seeds and fertilisers.</a:t>
+              <a:t>Milk powder.</a:t>
             </a:r>
             <a:endParaRPr lang="en-US" sz="4000" dirty="0"/>
           </a:p>
@@ -8280,7 +8458,7 @@
                 <a:ea typeface="Calibri" pitchFamily="34" charset="-122"/>
                 <a:cs typeface="Calibri" pitchFamily="34" charset="-120"/>
               </a:rPr>
-              <a:t>1. MIXED FARMING</a:t>
+              <a:t>1. TYPES OF FARMING</a:t>
             </a:r>
             <a:endParaRPr lang="en-US" sz="1400" dirty="0"/>
           </a:p>
@@ -8382,7 +8560,7 @@
                 <a:ea typeface="Times New Roman" pitchFamily="34" charset="-122"/>
                 <a:cs typeface="Times New Roman" pitchFamily="34" charset="-120"/>
               </a:rPr>
-              <a:t>Cows on a farm with fields.</a:t>
+              <a:t>Crops and animals on one farm.</a:t>
             </a:r>
             <a:endParaRPr lang="en-US" sz="1800" dirty="0"/>
           </a:p>
@@ -9089,7 +9267,7 @@
                 <a:ea typeface="Calibri" pitchFamily="34" charset="-122"/>
                 <a:cs typeface="Calibri" pitchFamily="34" charset="-120"/>
               </a:rPr>
-              <a:t>1. MIXED FARMING</a:t>
+              <a:t>1. TYPES OF FARMING</a:t>
             </a:r>
             <a:endParaRPr lang="en-US" sz="1400" dirty="0"/>
           </a:p>
@@ -9196,7 +9374,7 @@
                 <a:ea typeface="Times New Roman" pitchFamily="34" charset="-122"/>
                 <a:cs typeface="Times New Roman" pitchFamily="34" charset="-120"/>
               </a:rPr>
-              <a:t>This farmer grows crops and rears animals on the same farm. What is this type of farming?</a:t>
+              <a:t>What is this type of farming called?</a:t>
             </a:r>
             <a:endParaRPr lang="en-US" sz="4000" dirty="0"/>
           </a:p>
@@ -9308,7 +9486,7 @@
                 <a:ea typeface="Calibri" pitchFamily="34" charset="-122"/>
                 <a:cs typeface="Calibri" pitchFamily="34" charset="-120"/>
               </a:rPr>
-              <a:t>1. MIXED FARMING</a:t>
+              <a:t>1. TYPES OF FARMING</a:t>
             </a:r>
             <a:endParaRPr lang="en-US" sz="1400" dirty="0"/>
           </a:p>
@@ -9527,7 +9705,7 @@
                 <a:ea typeface="Calibri" pitchFamily="34" charset="-122"/>
                 <a:cs typeface="Calibri" pitchFamily="34" charset="-120"/>
               </a:rPr>
-              <a:t>1. DAIRY FARMING</a:t>
+              <a:t>1. TYPES OF FARMING</a:t>
             </a:r>
             <a:endParaRPr lang="en-US" sz="1400" dirty="0"/>
           </a:p>
@@ -9629,7 +9807,7 @@
                 <a:ea typeface="Times New Roman" pitchFamily="34" charset="-122"/>
                 <a:cs typeface="Times New Roman" pitchFamily="34" charset="-120"/>
               </a:rPr>
-              <a:t>Cows on a farm in the Netherlands.</a:t>
+              <a:t>Cows reared for milk.</a:t>
             </a:r>
             <a:endParaRPr lang="en-US" sz="1800" dirty="0"/>
           </a:p>
@@ -9741,7 +9919,7 @@
                 <a:ea typeface="Calibri" pitchFamily="34" charset="-122"/>
                 <a:cs typeface="Calibri" pitchFamily="34" charset="-120"/>
               </a:rPr>
-              <a:t>1. DAIRY FARMING</a:t>
+              <a:t>1. TYPES OF FARMING</a:t>
             </a:r>
             <a:endParaRPr lang="en-US" sz="1400" dirty="0"/>
           </a:p>
@@ -9848,7 +10026,7 @@
                 <a:ea typeface="Times New Roman" pitchFamily="34" charset="-122"/>
                 <a:cs typeface="Times New Roman" pitchFamily="34" charset="-120"/>
               </a:rPr>
-              <a:t>These cows are reared for milk, butter and cheese. What is this type of farming?</a:t>
+              <a:t>What is the rearing of cows for milk called?</a:t>
             </a:r>
             <a:endParaRPr lang="en-US" sz="4000" dirty="0"/>
           </a:p>
@@ -9960,7 +10138,7 @@
                 <a:ea typeface="Calibri" pitchFamily="34" charset="-122"/>
                 <a:cs typeface="Calibri" pitchFamily="34" charset="-120"/>
               </a:rPr>
-              <a:t>1. DAIRY FARMING</a:t>
+              <a:t>1. TYPES OF FARMING</a:t>
             </a:r>
             <a:endParaRPr lang="en-US" sz="1400" dirty="0"/>
           </a:p>
@@ -10179,7 +10357,7 @@
                 <a:ea typeface="Calibri" pitchFamily="34" charset="-122"/>
                 <a:cs typeface="Calibri" pitchFamily="34" charset="-120"/>
               </a:rPr>
-              <a:t>1. GRAIN FARMING</a:t>
+              <a:t>1. TYPES OF FARMING</a:t>
             </a:r>
             <a:endParaRPr lang="en-US" sz="1400" dirty="0"/>
           </a:p>
@@ -10281,7 +10459,7 @@
                 <a:ea typeface="Times New Roman" pitchFamily="34" charset="-122"/>
                 <a:cs typeface="Times New Roman" pitchFamily="34" charset="-120"/>
               </a:rPr>
-              <a:t>A big machine harvests wheat.</a:t>
+              <a:t>A machine harvests wheat.</a:t>
             </a:r>
             <a:endParaRPr lang="en-US" sz="1800" dirty="0"/>
           </a:p>
@@ -10393,7 +10571,7 @@
                 <a:ea typeface="Calibri" pitchFamily="34" charset="-122"/>
                 <a:cs typeface="Calibri" pitchFamily="34" charset="-120"/>
               </a:rPr>
-              <a:t>1. GRAIN FARMING</a:t>
+              <a:t>1. TYPES OF FARMING</a:t>
             </a:r>
             <a:endParaRPr lang="en-US" sz="1400" dirty="0"/>
           </a:p>
@@ -10612,7 +10790,7 @@
                 <a:ea typeface="Calibri" pitchFamily="34" charset="-122"/>
                 <a:cs typeface="Calibri" pitchFamily="34" charset="-120"/>
               </a:rPr>
-              <a:t>1. GRAIN FARMING</a:t>
+              <a:t>1. TYPES OF FARMING</a:t>
             </a:r>
             <a:endParaRPr lang="en-US" sz="1400" dirty="0"/>
           </a:p>
@@ -10831,7 +11009,7 @@
                 <a:ea typeface="Calibri" pitchFamily="34" charset="-122"/>
                 <a:cs typeface="Calibri" pitchFamily="34" charset="-120"/>
               </a:rPr>
-              <a:t>1. RANCHING</a:t>
+              <a:t>1. TYPES OF FARMING</a:t>
             </a:r>
             <a:endParaRPr lang="en-US" sz="1400" dirty="0"/>
           </a:p>
@@ -10933,7 +11111,7 @@
                 <a:ea typeface="Times New Roman" pitchFamily="34" charset="-122"/>
                 <a:cs typeface="Times New Roman" pitchFamily="34" charset="-120"/>
               </a:rPr>
-              <a:t>A farmer with his sheep.</a:t>
+              <a:t>Sheep on a huge farm.</a:t>
             </a:r>
             <a:endParaRPr lang="en-US" sz="1800" dirty="0"/>
           </a:p>
@@ -11045,7 +11223,7 @@
                 <a:ea typeface="Calibri" pitchFamily="34" charset="-122"/>
                 <a:cs typeface="Calibri" pitchFamily="34" charset="-120"/>
               </a:rPr>
-              <a:t>1. RANCHING</a:t>
+              <a:t>1. TYPES OF FARMING</a:t>
             </a:r>
             <a:endParaRPr lang="en-US" sz="1400" dirty="0"/>
           </a:p>
@@ -11152,7 +11330,7 @@
                 <a:ea typeface="Times New Roman" pitchFamily="34" charset="-122"/>
                 <a:cs typeface="Times New Roman" pitchFamily="34" charset="-120"/>
               </a:rPr>
-              <a:t>In Australia, sheep are reared on huge farms. What are these farms called?</a:t>
+              <a:t>What are huge animal farms called?</a:t>
             </a:r>
             <a:endParaRPr lang="en-US" sz="4000" dirty="0"/>
           </a:p>
@@ -12273,7 +12451,7 @@
                 <a:ea typeface="Calibri" pitchFamily="34" charset="-122"/>
                 <a:cs typeface="Calibri" pitchFamily="34" charset="-120"/>
               </a:rPr>
-              <a:t>1. RANCHING</a:t>
+              <a:t>1. TYPES OF FARMING</a:t>
             </a:r>
             <a:endParaRPr lang="en-US" sz="1400" dirty="0"/>
           </a:p>
@@ -12492,7 +12670,7 @@
                 <a:ea typeface="Calibri" pitchFamily="34" charset="-122"/>
                 <a:cs typeface="Calibri" pitchFamily="34" charset="-120"/>
               </a:rPr>
-              <a:t>1. MEDITERRANEAN FARMING</a:t>
+              <a:t>1. TYPES OF FARMING</a:t>
             </a:r>
             <a:endParaRPr lang="en-US" sz="1400" dirty="0"/>
           </a:p>
@@ -12594,7 +12772,7 @@
                 <a:ea typeface="Times New Roman" pitchFamily="34" charset="-122"/>
                 <a:cs typeface="Times New Roman" pitchFamily="34" charset="-120"/>
               </a:rPr>
-              <a:t>Picking grapes in France.</a:t>
+              <a:t>A vineyard.</a:t>
             </a:r>
             <a:endParaRPr lang="en-US" sz="1800" dirty="0"/>
           </a:p>
@@ -12706,7 +12884,7 @@
                 <a:ea typeface="Calibri" pitchFamily="34" charset="-122"/>
                 <a:cs typeface="Calibri" pitchFamily="34" charset="-120"/>
               </a:rPr>
-              <a:t>1. MEDITERRANEAN FARMING</a:t>
+              <a:t>1. TYPES OF FARMING</a:t>
             </a:r>
             <a:endParaRPr lang="en-US" sz="1400" dirty="0"/>
           </a:p>
@@ -12813,7 +12991,7 @@
                 <a:ea typeface="Times New Roman" pitchFamily="34" charset="-122"/>
                 <a:cs typeface="Times New Roman" pitchFamily="34" charset="-120"/>
               </a:rPr>
-              <a:t>Name two crops of Mediterranean farming.</a:t>
+              <a:t>Name one crop of Mediterranean farming.</a:t>
             </a:r>
             <a:endParaRPr lang="en-US" sz="4000" dirty="0"/>
           </a:p>
@@ -12925,7 +13103,7 @@
                 <a:ea typeface="Calibri" pitchFamily="34" charset="-122"/>
                 <a:cs typeface="Calibri" pitchFamily="34" charset="-120"/>
               </a:rPr>
-              <a:t>1. MEDITERRANEAN FARMING</a:t>
+              <a:t>1. TYPES OF FARMING</a:t>
             </a:r>
             <a:endParaRPr lang="en-US" sz="1400" dirty="0"/>
           </a:p>
@@ -13032,7 +13210,7 @@
                 <a:ea typeface="Times New Roman" pitchFamily="34" charset="-122"/>
                 <a:cs typeface="Times New Roman" pitchFamily="34" charset="-120"/>
               </a:rPr>
-              <a:t>Grapes and olives (also oranges and wheat).</a:t>
+              <a:t>Grapes (also olives and oranges).</a:t>
             </a:r>
             <a:endParaRPr lang="en-US" sz="4000" dirty="0"/>
           </a:p>
@@ -13468,7 +13646,7 @@
                 <a:ea typeface="Times New Roman" pitchFamily="34" charset="-122"/>
                 <a:cs typeface="Times New Roman" pitchFamily="34" charset="-120"/>
               </a:rPr>
-              <a:t>1. Types of Farming</a:t>
+              <a:t>DEFINITIONS</a:t>
             </a:r>
             <a:endParaRPr lang="en-US" sz="3600" dirty="0"/>
           </a:p>
@@ -13510,16 +13688,17 @@
                 <a:ea typeface="Times New Roman" pitchFamily="34" charset="-122"/>
                 <a:cs typeface="Times New Roman" pitchFamily="34" charset="-120"/>
               </a:rPr>
-              <a:t>The main types of farming in the temperate region are the following:</a:t>
+              <a:t>The key terms of this lesson are defined as follows:</a:t>
             </a:r>
             <a:endParaRPr lang="en-US" sz="4000" dirty="0"/>
           </a:p>
           <a:p>
-            <a:pPr algn="l" indent="0" marL="0">
+            <a:pPr algn="l" marL="342900" indent="-342900">
               <a:spcAft>
                 <a:spcPts val="800"/>
               </a:spcAft>
-              <a:buNone/>
+              <a:buSzPct val="100000"/>
+              <a:buChar char="•"/>
             </a:pPr>
             <a:r>
               <a:rPr lang="en-US" sz="4000" b="1" dirty="0">
@@ -13532,11 +13711,12 @@
               </a:rPr>
               <a:t>Mixed farming: </a:t>
             </a:r>
-            <a:pPr algn="l" indent="0" marL="0">
+            <a:pPr algn="l" marL="342900" indent="-342900">
               <a:spcAft>
                 <a:spcPts val="800"/>
               </a:spcAft>
-              <a:buNone/>
+              <a:buSzPct val="100000"/>
+              <a:buChar char="•"/>
             </a:pPr>
             <a:r>
               <a:rPr lang="en-US" sz="4000" dirty="0">
@@ -13547,7 +13727,46 @@
                 <a:ea typeface="Times New Roman" pitchFamily="34" charset="-122"/>
                 <a:cs typeface="Times New Roman" pitchFamily="34" charset="-120"/>
               </a:rPr>
-              <a:t>Farmers grow crops and rear animals on the same farm, as in England and France.</a:t>
+              <a:t>It is growing crops and rearing animals on the same farm.</a:t>
+            </a:r>
+            <a:endParaRPr lang="en-US" sz="4000" dirty="0"/>
+          </a:p>
+          <a:p>
+            <a:pPr algn="l" marL="342900" indent="-342900">
+              <a:spcAft>
+                <a:spcPts val="800"/>
+              </a:spcAft>
+              <a:buSzPct val="100000"/>
+              <a:buChar char="•"/>
+            </a:pPr>
+            <a:r>
+              <a:rPr lang="en-US" sz="4000" b="1" dirty="0">
+                <a:solidFill>
+                  <a:srgbClr val="111111"/>
+                </a:solidFill>
+                <a:latin typeface="Times New Roman" pitchFamily="34" charset="0"/>
+                <a:ea typeface="Times New Roman" pitchFamily="34" charset="-122"/>
+                <a:cs typeface="Times New Roman" pitchFamily="34" charset="-120"/>
+              </a:rPr>
+              <a:t>Mechanisation: </a:t>
+            </a:r>
+            <a:pPr algn="l" marL="342900" indent="-342900">
+              <a:spcAft>
+                <a:spcPts val="800"/>
+              </a:spcAft>
+              <a:buSzPct val="100000"/>
+              <a:buChar char="•"/>
+            </a:pPr>
+            <a:r>
+              <a:rPr lang="en-US" sz="4000" dirty="0">
+                <a:solidFill>
+                  <a:srgbClr val="111111"/>
+                </a:solidFill>
+                <a:latin typeface="Times New Roman" pitchFamily="34" charset="0"/>
+                <a:ea typeface="Times New Roman" pitchFamily="34" charset="-122"/>
+                <a:cs typeface="Times New Roman" pitchFamily="34" charset="-120"/>
+              </a:rPr>
+              <a:t>It is the use of machines on farms.</a:t>
             </a:r>
             <a:endParaRPr lang="en-US" sz="4000" dirty="0"/>
           </a:p>
@@ -13665,9 +13884,131 @@
           </a:p>
         </p:txBody>
       </p:sp>
+      <p:sp>
+        <p:nvSpPr>
+          <p:cNvPr id="3" name="Text 1"/>
+          <p:cNvSpPr/>
+          <p:nvPr/>
+        </p:nvSpPr>
+        <p:spPr>
+          <a:xfrm>
+            <a:off x="365760" y="1005840"/>
+            <a:ext cx="11460175" cy="731520"/>
+          </a:xfrm>
+          <a:prstGeom prst="rect">
+            <a:avLst/>
+          </a:prstGeom>
+          <a:noFill/>
+          <a:ln/>
+        </p:spPr>
+        <p:txBody>
+          <a:bodyPr wrap="square" lIns="0" tIns="0" rIns="0" bIns="0" rtlCol="0" anchor="ctr">
+            <a:normAutofit/>
+          </a:bodyPr>
+          <a:lstStyle/>
+          <a:p>
+            <a:pPr algn="ctr" indent="0" marL="0">
+              <a:buNone/>
+            </a:pPr>
+            <a:r>
+              <a:rPr lang="en-US" sz="3600" b="1" dirty="0">
+                <a:solidFill>
+                  <a:srgbClr val="990011"/>
+                </a:solidFill>
+                <a:latin typeface="Times New Roman" pitchFamily="34" charset="0"/>
+                <a:ea typeface="Times New Roman" pitchFamily="34" charset="-122"/>
+                <a:cs typeface="Times New Roman" pitchFamily="34" charset="-120"/>
+              </a:rPr>
+              <a:t>Farming in the Temperate Region</a:t>
+            </a:r>
+            <a:endParaRPr lang="en-US" sz="3600" dirty="0"/>
+          </a:p>
+        </p:txBody>
+      </p:sp>
+      <p:sp>
+        <p:nvSpPr>
+          <p:cNvPr id="4" name="Text 2"/>
+          <p:cNvSpPr/>
+          <p:nvPr/>
+        </p:nvSpPr>
+        <p:spPr>
+          <a:xfrm>
+            <a:off x="365760" y="1783080"/>
+            <a:ext cx="4846320" cy="4617720"/>
+          </a:xfrm>
+          <a:prstGeom prst="rect">
+            <a:avLst/>
+          </a:prstGeom>
+          <a:noFill/>
+          <a:ln/>
+        </p:spPr>
+        <p:txBody>
+          <a:bodyPr wrap="square" lIns="0" tIns="0" rIns="0" bIns="0" rtlCol="0" anchor="t"/>
+          <a:lstStyle/>
+          <a:p>
+            <a:pPr algn="l" indent="0" marL="0">
+              <a:spcAft>
+                <a:spcPts val="800"/>
+              </a:spcAft>
+              <a:buNone/>
+            </a:pPr>
+            <a:r>
+              <a:rPr lang="en-US" sz="3600" i="1" dirty="0">
+                <a:solidFill>
+                  <a:srgbClr val="111111"/>
+                </a:solidFill>
+                <a:latin typeface="Times New Roman" pitchFamily="34" charset="0"/>
+                <a:ea typeface="Times New Roman" pitchFamily="34" charset="-122"/>
+                <a:cs typeface="Times New Roman" pitchFamily="34" charset="-120"/>
+              </a:rPr>
+              <a:t>The main types of farming are the following:</a:t>
+            </a:r>
+            <a:endParaRPr lang="en-US" sz="3600" dirty="0"/>
+          </a:p>
+          <a:p>
+            <a:pPr algn="l" marL="342900" indent="-342900">
+              <a:spcAft>
+                <a:spcPts val="800"/>
+              </a:spcAft>
+              <a:buSzPct val="100000"/>
+              <a:buChar char="•"/>
+            </a:pPr>
+            <a:r>
+              <a:rPr lang="en-US" sz="3600" b="1" dirty="0">
+                <a:solidFill>
+                  <a:srgbClr val="111111"/>
+                </a:solidFill>
+                <a:latin typeface="Times New Roman" pitchFamily="34" charset="0"/>
+                <a:ea typeface="Times New Roman" pitchFamily="34" charset="-122"/>
+                <a:cs typeface="Times New Roman" pitchFamily="34" charset="-120"/>
+              </a:rPr>
+              <a:t>Mixed farming: </a:t>
+            </a:r>
+            <a:pPr algn="l" marL="342900" indent="-342900">
+              <a:spcAft>
+                <a:spcPts val="800"/>
+              </a:spcAft>
+              <a:buSzPct val="100000"/>
+              <a:buChar char="•"/>
+            </a:pPr>
+            <a:r>
+              <a:rPr lang="en-US" sz="3600" dirty="0">
+                <a:solidFill>
+                  <a:srgbClr val="111111"/>
+                </a:solidFill>
+                <a:latin typeface="Times New Roman" pitchFamily="34" charset="0"/>
+                <a:ea typeface="Times New Roman" pitchFamily="34" charset="-122"/>
+                <a:cs typeface="Times New Roman" pitchFamily="34" charset="-120"/>
+              </a:rPr>
+              <a:t>Crops and animals in Western Europe.</a:t>
+            </a:r>
+            <a:endParaRPr lang="en-US" sz="3600" dirty="0"/>
+          </a:p>
+        </p:txBody>
+      </p:sp>
       <p:pic>
         <p:nvPicPr>
-          <p:cNvPr id="3" name="Image 0" descr="/home/claude/f4/img/minesec_sheet.png">    </p:cNvPr>
+          <p:cNvPr id="5" name="Image 0" descr="/home/claude/f4/img/v2/f2t_mixed_farm.jpg">    </p:cNvPr>
           <p:cNvPicPr>
             <a:picLocks noChangeAspect="1"/>
           </p:cNvPicPr>
@@ -13681,8 +14022,8 @@
         </p:blipFill>
         <p:spPr>
           <a:xfrm>
-            <a:off x="0" y="658368"/>
-            <a:ext cx="3840480" cy="5833872"/>
+            <a:off x="5349240" y="2071212"/>
+            <a:ext cx="6659575" cy="3693983"/>
           </a:xfrm>
           <a:prstGeom prst="rect">
             <a:avLst/>
@@ -13691,14 +14032,14 @@
       </p:pic>
       <p:sp>
         <p:nvSpPr>
-          <p:cNvPr id="4" name="Text 1"/>
+          <p:cNvPr id="6" name="Text 3"/>
           <p:cNvSpPr/>
           <p:nvPr/>
         </p:nvSpPr>
         <p:spPr>
           <a:xfrm>
-            <a:off x="4069080" y="1005840"/>
-            <a:ext cx="7802575" cy="731520"/>
+            <a:off x="5349240" y="6089904"/>
+            <a:ext cx="6659575" cy="347472"/>
           </a:xfrm>
           <a:prstGeom prst="rect">
             <a:avLst/>
@@ -13707,122 +14048,24 @@
           <a:ln/>
         </p:spPr>
         <p:txBody>
-          <a:bodyPr wrap="square" lIns="0" tIns="0" rIns="0" bIns="0" rtlCol="0" anchor="ctr">
-            <a:normAutofit/>
-          </a:bodyPr>
+          <a:bodyPr wrap="square" lIns="0" tIns="0" rIns="0" bIns="0" rtlCol="0" anchor="ctr"/>
           <a:lstStyle/>
           <a:p>
             <a:pPr algn="ctr" indent="0" marL="0">
               <a:buNone/>
             </a:pPr>
             <a:r>
-              <a:rPr lang="en-US" sz="3600" b="1" dirty="0">
-                <a:solidFill>
-                  <a:srgbClr val="990011"/>
+              <a:rPr lang="en-US" sz="1600" i="1" dirty="0">
+                <a:solidFill>
+                  <a:srgbClr val="555555"/>
                 </a:solidFill>
                 <a:latin typeface="Times New Roman" pitchFamily="34" charset="0"/>
                 <a:ea typeface="Times New Roman" pitchFamily="34" charset="-122"/>
                 <a:cs typeface="Times New Roman" pitchFamily="34" charset="-120"/>
               </a:rPr>
-              <a:t>1. Types of Farming (continued)</a:t>
-            </a:r>
-            <a:endParaRPr lang="en-US" sz="3600" dirty="0"/>
-          </a:p>
-        </p:txBody>
-      </p:sp>
-      <p:sp>
-        <p:nvSpPr>
-          <p:cNvPr id="5" name="Text 2"/>
-          <p:cNvSpPr/>
-          <p:nvPr/>
-        </p:nvSpPr>
-        <p:spPr>
-          <a:xfrm>
-            <a:off x="4069080" y="1783080"/>
-            <a:ext cx="7802575" cy="4663440"/>
-          </a:xfrm>
-          <a:prstGeom prst="rect">
-            <a:avLst/>
-          </a:prstGeom>
-          <a:noFill/>
-          <a:ln/>
-        </p:spPr>
-        <p:txBody>
-          <a:bodyPr wrap="square" lIns="0" tIns="0" rIns="0" bIns="0" rtlCol="0" anchor="t"/>
-          <a:lstStyle/>
-          <a:p>
-            <a:pPr algn="l" indent="0" marL="0">
-              <a:spcAft>
-                <a:spcPts val="800"/>
-              </a:spcAft>
-              <a:buNone/>
-            </a:pPr>
-            <a:r>
-              <a:rPr lang="en-US" sz="4000" b="1" dirty="0">
-                <a:solidFill>
-                  <a:srgbClr val="111111"/>
-                </a:solidFill>
-                <a:latin typeface="Times New Roman" pitchFamily="34" charset="0"/>
-                <a:ea typeface="Times New Roman" pitchFamily="34" charset="-122"/>
-                <a:cs typeface="Times New Roman" pitchFamily="34" charset="-120"/>
-              </a:rPr>
-              <a:t>Dairy farming: </a:t>
-            </a:r>
-            <a:pPr algn="l" indent="0" marL="0">
-              <a:spcAft>
-                <a:spcPts val="800"/>
-              </a:spcAft>
-              <a:buNone/>
-            </a:pPr>
-            <a:r>
-              <a:rPr lang="en-US" sz="4000" dirty="0">
-                <a:solidFill>
-                  <a:srgbClr val="111111"/>
-                </a:solidFill>
-                <a:latin typeface="Times New Roman" pitchFamily="34" charset="0"/>
-                <a:ea typeface="Times New Roman" pitchFamily="34" charset="-122"/>
-                <a:cs typeface="Times New Roman" pitchFamily="34" charset="-120"/>
-              </a:rPr>
-              <a:t>Farmers rear cows for milk, butter and cheese, as in the Netherlands and Denmark.</a:t>
-            </a:r>
-            <a:endParaRPr lang="en-US" sz="4000" dirty="0"/>
-          </a:p>
-          <a:p>
-            <a:pPr algn="l" indent="0" marL="0">
-              <a:spcAft>
-                <a:spcPts val="800"/>
-              </a:spcAft>
-              <a:buNone/>
-            </a:pPr>
-            <a:r>
-              <a:rPr lang="en-US" sz="4000" b="1" dirty="0">
-                <a:solidFill>
-                  <a:srgbClr val="111111"/>
-                </a:solidFill>
-                <a:latin typeface="Times New Roman" pitchFamily="34" charset="0"/>
-                <a:ea typeface="Times New Roman" pitchFamily="34" charset="-122"/>
-                <a:cs typeface="Times New Roman" pitchFamily="34" charset="-120"/>
-              </a:rPr>
-              <a:t>Grain farming: </a:t>
-            </a:r>
-            <a:pPr algn="l" indent="0" marL="0">
-              <a:spcAft>
-                <a:spcPts val="800"/>
-              </a:spcAft>
-              <a:buNone/>
-            </a:pPr>
-            <a:r>
-              <a:rPr lang="en-US" sz="4000" dirty="0">
-                <a:solidFill>
-                  <a:srgbClr val="111111"/>
-                </a:solidFill>
-                <a:latin typeface="Times New Roman" pitchFamily="34" charset="0"/>
-                <a:ea typeface="Times New Roman" pitchFamily="34" charset="-122"/>
-                <a:cs typeface="Times New Roman" pitchFamily="34" charset="-120"/>
-              </a:rPr>
-              <a:t>Farmers grow wheat on very large farms, as on the Prairies of Canada.</a:t>
-            </a:r>
-            <a:endParaRPr lang="en-US" sz="4000" dirty="0"/>
+              <a:t>Illustration: mixed farming</a:t>
+            </a:r>
+            <a:endParaRPr lang="en-US" sz="1600" dirty="0"/>
           </a:p>
         </p:txBody>
       </p:sp>
@@ -13938,9 +14181,111 @@
           </a:p>
         </p:txBody>
       </p:sp>
+      <p:sp>
+        <p:nvSpPr>
+          <p:cNvPr id="3" name="Text 1"/>
+          <p:cNvSpPr/>
+          <p:nvPr/>
+        </p:nvSpPr>
+        <p:spPr>
+          <a:xfrm>
+            <a:off x="365760" y="1005840"/>
+            <a:ext cx="11460175" cy="731520"/>
+          </a:xfrm>
+          <a:prstGeom prst="rect">
+            <a:avLst/>
+          </a:prstGeom>
+          <a:noFill/>
+          <a:ln/>
+        </p:spPr>
+        <p:txBody>
+          <a:bodyPr wrap="square" lIns="0" tIns="0" rIns="0" bIns="0" rtlCol="0" anchor="ctr">
+            <a:normAutofit/>
+          </a:bodyPr>
+          <a:lstStyle/>
+          <a:p>
+            <a:pPr algn="ctr" indent="0" marL="0">
+              <a:buNone/>
+            </a:pPr>
+            <a:r>
+              <a:rPr lang="en-US" sz="3600" b="1" dirty="0">
+                <a:solidFill>
+                  <a:srgbClr val="990011"/>
+                </a:solidFill>
+                <a:latin typeface="Times New Roman" pitchFamily="34" charset="0"/>
+                <a:ea typeface="Times New Roman" pitchFamily="34" charset="-122"/>
+                <a:cs typeface="Times New Roman" pitchFamily="34" charset="-120"/>
+              </a:rPr>
+              <a:t>Farming in the Temperate Region</a:t>
+            </a:r>
+            <a:endParaRPr lang="en-US" sz="3600" dirty="0"/>
+          </a:p>
+        </p:txBody>
+      </p:sp>
+      <p:sp>
+        <p:nvSpPr>
+          <p:cNvPr id="4" name="Text 2"/>
+          <p:cNvSpPr/>
+          <p:nvPr/>
+        </p:nvSpPr>
+        <p:spPr>
+          <a:xfrm>
+            <a:off x="365760" y="1783080"/>
+            <a:ext cx="4846320" cy="4617720"/>
+          </a:xfrm>
+          <a:prstGeom prst="rect">
+            <a:avLst/>
+          </a:prstGeom>
+          <a:noFill/>
+          <a:ln/>
+        </p:spPr>
+        <p:txBody>
+          <a:bodyPr wrap="square" lIns="0" tIns="0" rIns="0" bIns="0" rtlCol="0" anchor="t"/>
+          <a:lstStyle/>
+          <a:p>
+            <a:pPr algn="l" marL="342900" indent="-342900">
+              <a:spcAft>
+                <a:spcPts val="800"/>
+              </a:spcAft>
+              <a:buSzPct val="100000"/>
+              <a:buChar char="•"/>
+            </a:pPr>
+            <a:r>
+              <a:rPr lang="en-US" sz="3600" b="1" dirty="0">
+                <a:solidFill>
+                  <a:srgbClr val="111111"/>
+                </a:solidFill>
+                <a:latin typeface="Times New Roman" pitchFamily="34" charset="0"/>
+                <a:ea typeface="Times New Roman" pitchFamily="34" charset="-122"/>
+                <a:cs typeface="Times New Roman" pitchFamily="34" charset="-120"/>
+              </a:rPr>
+              <a:t>Dairy farming: </a:t>
+            </a:r>
+            <a:pPr algn="l" marL="342900" indent="-342900">
+              <a:spcAft>
+                <a:spcPts val="800"/>
+              </a:spcAft>
+              <a:buSzPct val="100000"/>
+              <a:buChar char="•"/>
+            </a:pPr>
+            <a:r>
+              <a:rPr lang="en-US" sz="3600" dirty="0">
+                <a:solidFill>
+                  <a:srgbClr val="111111"/>
+                </a:solidFill>
+                <a:latin typeface="Times New Roman" pitchFamily="34" charset="0"/>
+                <a:ea typeface="Times New Roman" pitchFamily="34" charset="-122"/>
+                <a:cs typeface="Times New Roman" pitchFamily="34" charset="-120"/>
+              </a:rPr>
+              <a:t>Milk, butter and cheese in the Netherlands and Denmark.</a:t>
+            </a:r>
+            <a:endParaRPr lang="en-US" sz="3600" dirty="0"/>
+          </a:p>
+        </p:txBody>
+      </p:sp>
       <p:pic>
         <p:nvPicPr>
-          <p:cNvPr id="3" name="Image 0" descr="/home/claude/f4/img/minesec_sheet.png">    </p:cNvPr>
+          <p:cNvPr id="5" name="Image 0" descr="/home/claude/f4/img/v2/f2t_dairy.jpg">    </p:cNvPr>
           <p:cNvPicPr>
             <a:picLocks noChangeAspect="1"/>
           </p:cNvPicPr>
@@ -13954,8 +14299,8 @@
         </p:blipFill>
         <p:spPr>
           <a:xfrm>
-            <a:off x="0" y="658368"/>
-            <a:ext cx="5120640" cy="5833872"/>
+            <a:off x="5349240" y="2071212"/>
+            <a:ext cx="6659575" cy="3693983"/>
           </a:xfrm>
           <a:prstGeom prst="rect">
             <a:avLst/>
@@ -13964,14 +14309,14 @@
       </p:pic>
       <p:sp>
         <p:nvSpPr>
-          <p:cNvPr id="4" name="Text 1"/>
+          <p:cNvPr id="6" name="Text 3"/>
           <p:cNvSpPr/>
           <p:nvPr/>
         </p:nvSpPr>
         <p:spPr>
           <a:xfrm>
-            <a:off x="5349240" y="1005840"/>
-            <a:ext cx="6522415" cy="731520"/>
+            <a:off x="5349240" y="6089904"/>
+            <a:ext cx="6659575" cy="347472"/>
           </a:xfrm>
           <a:prstGeom prst="rect">
             <a:avLst/>
@@ -13980,122 +14325,24 @@
           <a:ln/>
         </p:spPr>
         <p:txBody>
-          <a:bodyPr wrap="square" lIns="0" tIns="0" rIns="0" bIns="0" rtlCol="0" anchor="ctr">
-            <a:normAutofit/>
-          </a:bodyPr>
+          <a:bodyPr wrap="square" lIns="0" tIns="0" rIns="0" bIns="0" rtlCol="0" anchor="ctr"/>
           <a:lstStyle/>
           <a:p>
             <a:pPr algn="ctr" indent="0" marL="0">
               <a:buNone/>
             </a:pPr>
             <a:r>
-              <a:rPr lang="en-US" sz="3600" b="1" dirty="0">
-                <a:solidFill>
-                  <a:srgbClr val="990011"/>
+              <a:rPr lang="en-US" sz="1600" i="1" dirty="0">
+                <a:solidFill>
+                  <a:srgbClr val="555555"/>
                 </a:solidFill>
                 <a:latin typeface="Times New Roman" pitchFamily="34" charset="0"/>
                 <a:ea typeface="Times New Roman" pitchFamily="34" charset="-122"/>
                 <a:cs typeface="Times New Roman" pitchFamily="34" charset="-120"/>
               </a:rPr>
-              <a:t>1. Types of Farming (continued)</a:t>
-            </a:r>
-            <a:endParaRPr lang="en-US" sz="3600" dirty="0"/>
-          </a:p>
-        </p:txBody>
-      </p:sp>
-      <p:sp>
-        <p:nvSpPr>
-          <p:cNvPr id="5" name="Text 2"/>
-          <p:cNvSpPr/>
-          <p:nvPr/>
-        </p:nvSpPr>
-        <p:spPr>
-          <a:xfrm>
-            <a:off x="5349240" y="1783080"/>
-            <a:ext cx="6522415" cy="4663440"/>
-          </a:xfrm>
-          <a:prstGeom prst="rect">
-            <a:avLst/>
-          </a:prstGeom>
-          <a:noFill/>
-          <a:ln/>
-        </p:spPr>
-        <p:txBody>
-          <a:bodyPr wrap="square" lIns="0" tIns="0" rIns="0" bIns="0" rtlCol="0" anchor="t"/>
-          <a:lstStyle/>
-          <a:p>
-            <a:pPr algn="l" indent="0" marL="0">
-              <a:spcAft>
-                <a:spcPts val="800"/>
-              </a:spcAft>
-              <a:buNone/>
-            </a:pPr>
-            <a:r>
-              <a:rPr lang="en-US" sz="4000" b="1" dirty="0">
-                <a:solidFill>
-                  <a:srgbClr val="111111"/>
-                </a:solidFill>
-                <a:latin typeface="Times New Roman" pitchFamily="34" charset="0"/>
-                <a:ea typeface="Times New Roman" pitchFamily="34" charset="-122"/>
-                <a:cs typeface="Times New Roman" pitchFamily="34" charset="-120"/>
-              </a:rPr>
-              <a:t>Ranching: </a:t>
-            </a:r>
-            <a:pPr algn="l" indent="0" marL="0">
-              <a:spcAft>
-                <a:spcPts val="800"/>
-              </a:spcAft>
-              <a:buNone/>
-            </a:pPr>
-            <a:r>
-              <a:rPr lang="en-US" sz="4000" dirty="0">
-                <a:solidFill>
-                  <a:srgbClr val="111111"/>
-                </a:solidFill>
-                <a:latin typeface="Times New Roman" pitchFamily="34" charset="0"/>
-                <a:ea typeface="Times New Roman" pitchFamily="34" charset="-122"/>
-                <a:cs typeface="Times New Roman" pitchFamily="34" charset="-120"/>
-              </a:rPr>
-              <a:t>Cattle and sheep are reared on very large farms, as in Argentina and Australia.</a:t>
-            </a:r>
-            <a:endParaRPr lang="en-US" sz="4000" dirty="0"/>
-          </a:p>
-          <a:p>
-            <a:pPr algn="l" indent="0" marL="0">
-              <a:spcAft>
-                <a:spcPts val="800"/>
-              </a:spcAft>
-              <a:buNone/>
-            </a:pPr>
-            <a:r>
-              <a:rPr lang="en-US" sz="4000" b="1" dirty="0">
-                <a:solidFill>
-                  <a:srgbClr val="111111"/>
-                </a:solidFill>
-                <a:latin typeface="Times New Roman" pitchFamily="34" charset="0"/>
-                <a:ea typeface="Times New Roman" pitchFamily="34" charset="-122"/>
-                <a:cs typeface="Times New Roman" pitchFamily="34" charset="-120"/>
-              </a:rPr>
-              <a:t>Mediterranean farming: </a:t>
-            </a:r>
-            <a:pPr algn="l" indent="0" marL="0">
-              <a:spcAft>
-                <a:spcPts val="800"/>
-              </a:spcAft>
-              <a:buNone/>
-            </a:pPr>
-            <a:r>
-              <a:rPr lang="en-US" sz="4000" dirty="0">
-                <a:solidFill>
-                  <a:srgbClr val="111111"/>
-                </a:solidFill>
-                <a:latin typeface="Times New Roman" pitchFamily="34" charset="0"/>
-                <a:ea typeface="Times New Roman" pitchFamily="34" charset="-122"/>
-                <a:cs typeface="Times New Roman" pitchFamily="34" charset="-120"/>
-              </a:rPr>
-              <a:t>Farmers grow olives, grapes and oranges.</a:t>
-            </a:r>
-            <a:endParaRPr lang="en-US" sz="4000" dirty="0"/>
+              <a:t>Illustration: dairy farming</a:t>
+            </a:r>
+            <a:endParaRPr lang="en-US" sz="1600" dirty="0"/>
           </a:p>
         </p:txBody>
       </p:sp>
@@ -14211,9 +14458,111 @@
           </a:p>
         </p:txBody>
       </p:sp>
+      <p:sp>
+        <p:nvSpPr>
+          <p:cNvPr id="3" name="Text 1"/>
+          <p:cNvSpPr/>
+          <p:nvPr/>
+        </p:nvSpPr>
+        <p:spPr>
+          <a:xfrm>
+            <a:off x="365760" y="1005840"/>
+            <a:ext cx="11460175" cy="731520"/>
+          </a:xfrm>
+          <a:prstGeom prst="rect">
+            <a:avLst/>
+          </a:prstGeom>
+          <a:noFill/>
+          <a:ln/>
+        </p:spPr>
+        <p:txBody>
+          <a:bodyPr wrap="square" lIns="0" tIns="0" rIns="0" bIns="0" rtlCol="0" anchor="ctr">
+            <a:normAutofit/>
+          </a:bodyPr>
+          <a:lstStyle/>
+          <a:p>
+            <a:pPr algn="ctr" indent="0" marL="0">
+              <a:buNone/>
+            </a:pPr>
+            <a:r>
+              <a:rPr lang="en-US" sz="3600" b="1" dirty="0">
+                <a:solidFill>
+                  <a:srgbClr val="990011"/>
+                </a:solidFill>
+                <a:latin typeface="Times New Roman" pitchFamily="34" charset="0"/>
+                <a:ea typeface="Times New Roman" pitchFamily="34" charset="-122"/>
+                <a:cs typeface="Times New Roman" pitchFamily="34" charset="-120"/>
+              </a:rPr>
+              <a:t>Farming in the Temperate Region</a:t>
+            </a:r>
+            <a:endParaRPr lang="en-US" sz="3600" dirty="0"/>
+          </a:p>
+        </p:txBody>
+      </p:sp>
+      <p:sp>
+        <p:nvSpPr>
+          <p:cNvPr id="4" name="Text 2"/>
+          <p:cNvSpPr/>
+          <p:nvPr/>
+        </p:nvSpPr>
+        <p:spPr>
+          <a:xfrm>
+            <a:off x="365760" y="1783080"/>
+            <a:ext cx="4846320" cy="4617720"/>
+          </a:xfrm>
+          <a:prstGeom prst="rect">
+            <a:avLst/>
+          </a:prstGeom>
+          <a:noFill/>
+          <a:ln/>
+        </p:spPr>
+        <p:txBody>
+          <a:bodyPr wrap="square" lIns="0" tIns="0" rIns="0" bIns="0" rtlCol="0" anchor="t"/>
+          <a:lstStyle/>
+          <a:p>
+            <a:pPr algn="l" marL="342900" indent="-342900">
+              <a:spcAft>
+                <a:spcPts val="800"/>
+              </a:spcAft>
+              <a:buSzPct val="100000"/>
+              <a:buChar char="•"/>
+            </a:pPr>
+            <a:r>
+              <a:rPr lang="en-US" sz="3600" b="1" dirty="0">
+                <a:solidFill>
+                  <a:srgbClr val="111111"/>
+                </a:solidFill>
+                <a:latin typeface="Times New Roman" pitchFamily="34" charset="0"/>
+                <a:ea typeface="Times New Roman" pitchFamily="34" charset="-122"/>
+                <a:cs typeface="Times New Roman" pitchFamily="34" charset="-120"/>
+              </a:rPr>
+              <a:t>Wheat farming: </a:t>
+            </a:r>
+            <a:pPr algn="l" marL="342900" indent="-342900">
+              <a:spcAft>
+                <a:spcPts val="800"/>
+              </a:spcAft>
+              <a:buSzPct val="100000"/>
+              <a:buChar char="•"/>
+            </a:pPr>
+            <a:r>
+              <a:rPr lang="en-US" sz="3600" dirty="0">
+                <a:solidFill>
+                  <a:srgbClr val="111111"/>
+                </a:solidFill>
+                <a:latin typeface="Times New Roman" pitchFamily="34" charset="0"/>
+                <a:ea typeface="Times New Roman" pitchFamily="34" charset="-122"/>
+                <a:cs typeface="Times New Roman" pitchFamily="34" charset="-120"/>
+              </a:rPr>
+              <a:t>Huge wheat farms with machines in Canada and Ukraine.</a:t>
+            </a:r>
+            <a:endParaRPr lang="en-US" sz="3600" dirty="0"/>
+          </a:p>
+        </p:txBody>
+      </p:sp>
       <p:pic>
         <p:nvPicPr>
-          <p:cNvPr id="3" name="Image 0" descr="/home/claude/f4/img/minesec_sheet.png">    </p:cNvPr>
+          <p:cNvPr id="5" name="Image 0" descr="/home/claude/f4/img/v2/f2t_combine.jpg">    </p:cNvPr>
           <p:cNvPicPr>
             <a:picLocks noChangeAspect="1"/>
           </p:cNvPicPr>
@@ -14227,8 +14576,8 @@
         </p:blipFill>
         <p:spPr>
           <a:xfrm>
-            <a:off x="0" y="658368"/>
-            <a:ext cx="3840480" cy="5833872"/>
+            <a:off x="5349240" y="2071212"/>
+            <a:ext cx="6659575" cy="3693983"/>
           </a:xfrm>
           <a:prstGeom prst="rect">
             <a:avLst/>
@@ -14237,14 +14586,14 @@
       </p:pic>
       <p:sp>
         <p:nvSpPr>
-          <p:cNvPr id="4" name="Text 1"/>
+          <p:cNvPr id="6" name="Text 3"/>
           <p:cNvSpPr/>
           <p:nvPr/>
         </p:nvSpPr>
         <p:spPr>
           <a:xfrm>
-            <a:off x="4069080" y="1005840"/>
-            <a:ext cx="7802575" cy="731520"/>
+            <a:off x="5349240" y="6089904"/>
+            <a:ext cx="6659575" cy="347472"/>
           </a:xfrm>
           <a:prstGeom prst="rect">
             <a:avLst/>
@@ -14253,142 +14602,24 @@
           <a:ln/>
         </p:spPr>
         <p:txBody>
-          <a:bodyPr wrap="square" lIns="0" tIns="0" rIns="0" bIns="0" rtlCol="0" anchor="ctr">
-            <a:normAutofit/>
-          </a:bodyPr>
+          <a:bodyPr wrap="square" lIns="0" tIns="0" rIns="0" bIns="0" rtlCol="0" anchor="ctr"/>
           <a:lstStyle/>
           <a:p>
             <a:pPr algn="ctr" indent="0" marL="0">
               <a:buNone/>
             </a:pPr>
             <a:r>
-              <a:rPr lang="en-US" sz="3600" b="1" dirty="0">
-                <a:solidFill>
-                  <a:srgbClr val="990011"/>
+              <a:rPr lang="en-US" sz="1600" i="1" dirty="0">
+                <a:solidFill>
+                  <a:srgbClr val="555555"/>
                 </a:solidFill>
                 <a:latin typeface="Times New Roman" pitchFamily="34" charset="0"/>
                 <a:ea typeface="Times New Roman" pitchFamily="34" charset="-122"/>
                 <a:cs typeface="Times New Roman" pitchFamily="34" charset="-120"/>
               </a:rPr>
-              <a:t>2. Characteristics of Temperate Farming</a:t>
-            </a:r>
-            <a:endParaRPr lang="en-US" sz="3600" dirty="0"/>
-          </a:p>
-        </p:txBody>
-      </p:sp>
-      <p:sp>
-        <p:nvSpPr>
-          <p:cNvPr id="5" name="Text 2"/>
-          <p:cNvSpPr/>
-          <p:nvPr/>
-        </p:nvSpPr>
-        <p:spPr>
-          <a:xfrm>
-            <a:off x="4069080" y="1783080"/>
-            <a:ext cx="7802575" cy="4663440"/>
-          </a:xfrm>
-          <a:prstGeom prst="rect">
-            <a:avLst/>
-          </a:prstGeom>
-          <a:noFill/>
-          <a:ln/>
-        </p:spPr>
-        <p:txBody>
-          <a:bodyPr wrap="square" lIns="0" tIns="0" rIns="0" bIns="0" rtlCol="0" anchor="t"/>
-          <a:lstStyle/>
-          <a:p>
-            <a:pPr algn="l" indent="0" marL="0">
-              <a:spcAft>
-                <a:spcPts val="800"/>
-              </a:spcAft>
-              <a:buNone/>
-            </a:pPr>
-            <a:r>
-              <a:rPr lang="en-US" sz="4000" i="1" dirty="0">
-                <a:solidFill>
-                  <a:srgbClr val="111111"/>
-                </a:solidFill>
-                <a:latin typeface="Times New Roman" pitchFamily="34" charset="0"/>
-                <a:ea typeface="Times New Roman" pitchFamily="34" charset="-122"/>
-                <a:cs typeface="Times New Roman" pitchFamily="34" charset="-120"/>
-              </a:rPr>
-              <a:t>Farming in the temperate region has the following characteristics:</a:t>
-            </a:r>
-            <a:endParaRPr lang="en-US" sz="4000" dirty="0"/>
-          </a:p>
-          <a:p>
-            <a:pPr algn="l" indent="0" marL="0">
-              <a:spcAft>
-                <a:spcPts val="800"/>
-              </a:spcAft>
-              <a:buNone/>
-            </a:pPr>
-            <a:r>
-              <a:rPr lang="en-US" sz="4000" b="1" dirty="0">
-                <a:solidFill>
-                  <a:srgbClr val="111111"/>
-                </a:solidFill>
-                <a:latin typeface="Times New Roman" pitchFamily="34" charset="0"/>
-                <a:ea typeface="Times New Roman" pitchFamily="34" charset="-122"/>
-                <a:cs typeface="Times New Roman" pitchFamily="34" charset="-120"/>
-              </a:rPr>
-              <a:t>Machines: </a:t>
-            </a:r>
-            <a:pPr algn="l" indent="0" marL="0">
-              <a:spcAft>
-                <a:spcPts val="800"/>
-              </a:spcAft>
-              <a:buNone/>
-            </a:pPr>
-            <a:r>
-              <a:rPr lang="en-US" sz="4000" dirty="0">
-                <a:solidFill>
-                  <a:srgbClr val="111111"/>
-                </a:solidFill>
-                <a:latin typeface="Times New Roman" pitchFamily="34" charset="0"/>
-                <a:ea typeface="Times New Roman" pitchFamily="34" charset="-122"/>
-                <a:cs typeface="Times New Roman" pitchFamily="34" charset="-120"/>
-              </a:rPr>
-              <a:t>Farmers use machines, so few workers produce a lot.</a:t>
-            </a:r>
-            <a:endParaRPr lang="en-US" sz="4000" dirty="0"/>
-          </a:p>
-          <a:p>
-            <a:pPr algn="l" indent="0" marL="0">
-              <a:spcAft>
-                <a:spcPts val="800"/>
-              </a:spcAft>
-              <a:buNone/>
-            </a:pPr>
-            <a:r>
-              <a:rPr lang="en-US" sz="4000" b="1" dirty="0">
-                <a:solidFill>
-                  <a:srgbClr val="111111"/>
-                </a:solidFill>
-                <a:latin typeface="Times New Roman" pitchFamily="34" charset="0"/>
-                <a:ea typeface="Times New Roman" pitchFamily="34" charset="-122"/>
-                <a:cs typeface="Times New Roman" pitchFamily="34" charset="-120"/>
-              </a:rPr>
-              <a:t>Science: </a:t>
-            </a:r>
-            <a:pPr algn="l" indent="0" marL="0">
-              <a:spcAft>
-                <a:spcPts val="800"/>
-              </a:spcAft>
-              <a:buNone/>
-            </a:pPr>
-            <a:r>
-              <a:rPr lang="en-US" sz="4000" dirty="0">
-                <a:solidFill>
-                  <a:srgbClr val="111111"/>
-                </a:solidFill>
-                <a:latin typeface="Times New Roman" pitchFamily="34" charset="0"/>
-                <a:ea typeface="Times New Roman" pitchFamily="34" charset="-122"/>
-                <a:cs typeface="Times New Roman" pitchFamily="34" charset="-120"/>
-              </a:rPr>
-              <a:t>Farmers use good seeds, fertilisers and modern methods.</a:t>
-            </a:r>
-            <a:endParaRPr lang="en-US" sz="4000" dirty="0"/>
+              <a:t>Illustration: harvesting wheat</a:t>
+            </a:r>
+            <a:endParaRPr lang="en-US" sz="1600" dirty="0"/>
           </a:p>
         </p:txBody>
       </p:sp>
@@ -14563,7 +14794,7 @@
                 <a:ea typeface="Times New Roman" pitchFamily="34" charset="-122"/>
                 <a:cs typeface="Times New Roman" pitchFamily="34" charset="-120"/>
               </a:rPr>
-              <a:t>2. Characteristics of Temperate Farming (continued)</a:t>
+              <a:t>Farming in the Temperate Region</a:t>
             </a:r>
             <a:endParaRPr lang="en-US" sz="3600" dirty="0"/>
           </a:p>
@@ -14590,11 +14821,12 @@
           <a:bodyPr wrap="square" lIns="0" tIns="0" rIns="0" bIns="0" rtlCol="0" anchor="t"/>
           <a:lstStyle/>
           <a:p>
-            <a:pPr algn="l" indent="0" marL="0">
+            <a:pPr algn="l" marL="342900" indent="-342900">
               <a:spcAft>
                 <a:spcPts val="800"/>
               </a:spcAft>
-              <a:buNone/>
+              <a:buSzPct val="100000"/>
+              <a:buChar char="•"/>
             </a:pPr>
             <a:r>
               <a:rPr lang="en-US" sz="4000" b="1" dirty="0">
@@ -14605,13 +14837,14 @@
                 <a:ea typeface="Times New Roman" pitchFamily="34" charset="-122"/>
                 <a:cs typeface="Times New Roman" pitchFamily="34" charset="-120"/>
               </a:rPr>
-              <a:t>Trade: </a:t>
-            </a:r>
-            <a:pPr algn="l" indent="0" marL="0">
+              <a:t>Ranching: </a:t>
+            </a:r>
+            <a:pPr algn="l" marL="342900" indent="-342900">
               <a:spcAft>
                 <a:spcPts val="800"/>
               </a:spcAft>
-              <a:buNone/>
+              <a:buSzPct val="100000"/>
+              <a:buChar char="•"/>
             </a:pPr>
             <a:r>
               <a:rPr lang="en-US" sz="4000" dirty="0">
@@ -14622,7 +14855,7 @@
                 <a:ea typeface="Times New Roman" pitchFamily="34" charset="-122"/>
                 <a:cs typeface="Times New Roman" pitchFamily="34" charset="-120"/>
               </a:rPr>
-              <a:t>Most farm products are sold in markets at home and abroad.</a:t>
+              <a:t>Cattle and sheep on huge farms in Australia and Argentina.</a:t>
             </a:r>
             <a:endParaRPr lang="en-US" sz="4000" dirty="0"/>
           </a:p>
@@ -14973,15 +15206,117 @@
                 <a:ea typeface="Calibri" pitchFamily="34" charset="-122"/>
                 <a:cs typeface="Calibri" pitchFamily="34" charset="-120"/>
               </a:rPr>
-              <a:t>FORMATIVE EVALUATION</a:t>
+              <a:t>BOARD SUMMARY</a:t>
             </a:r>
             <a:endParaRPr lang="en-US" sz="1400" dirty="0"/>
+          </a:p>
+        </p:txBody>
+      </p:sp>
+      <p:sp>
+        <p:nvSpPr>
+          <p:cNvPr id="3" name="Text 1"/>
+          <p:cNvSpPr/>
+          <p:nvPr/>
+        </p:nvSpPr>
+        <p:spPr>
+          <a:xfrm>
+            <a:off x="365760" y="1005840"/>
+            <a:ext cx="11460175" cy="731520"/>
+          </a:xfrm>
+          <a:prstGeom prst="rect">
+            <a:avLst/>
+          </a:prstGeom>
+          <a:noFill/>
+          <a:ln/>
+        </p:spPr>
+        <p:txBody>
+          <a:bodyPr wrap="square" lIns="0" tIns="0" rIns="0" bIns="0" rtlCol="0" anchor="ctr">
+            <a:normAutofit/>
+          </a:bodyPr>
+          <a:lstStyle/>
+          <a:p>
+            <a:pPr algn="ctr" indent="0" marL="0">
+              <a:buNone/>
+            </a:pPr>
+            <a:r>
+              <a:rPr lang="en-US" sz="3600" b="1" dirty="0">
+                <a:solidFill>
+                  <a:srgbClr val="990011"/>
+                </a:solidFill>
+                <a:latin typeface="Times New Roman" pitchFamily="34" charset="0"/>
+                <a:ea typeface="Times New Roman" pitchFamily="34" charset="-122"/>
+                <a:cs typeface="Times New Roman" pitchFamily="34" charset="-120"/>
+              </a:rPr>
+              <a:t>Farming in the Temperate Region</a:t>
+            </a:r>
+            <a:endParaRPr lang="en-US" sz="3600" dirty="0"/>
+          </a:p>
+        </p:txBody>
+      </p:sp>
+      <p:sp>
+        <p:nvSpPr>
+          <p:cNvPr id="4" name="Text 2"/>
+          <p:cNvSpPr/>
+          <p:nvPr/>
+        </p:nvSpPr>
+        <p:spPr>
+          <a:xfrm>
+            <a:off x="365760" y="1783080"/>
+            <a:ext cx="4846320" cy="4617720"/>
+          </a:xfrm>
+          <a:prstGeom prst="rect">
+            <a:avLst/>
+          </a:prstGeom>
+          <a:noFill/>
+          <a:ln/>
+        </p:spPr>
+        <p:txBody>
+          <a:bodyPr wrap="square" lIns="0" tIns="0" rIns="0" bIns="0" rtlCol="0" anchor="t"/>
+          <a:lstStyle/>
+          <a:p>
+            <a:pPr algn="l" marL="342900" indent="-342900">
+              <a:spcAft>
+                <a:spcPts val="800"/>
+              </a:spcAft>
+              <a:buSzPct val="100000"/>
+              <a:buChar char="•"/>
+            </a:pPr>
+            <a:r>
+              <a:rPr lang="en-US" sz="3600" b="1" dirty="0">
+                <a:solidFill>
+                  <a:srgbClr val="111111"/>
+                </a:solidFill>
+                <a:latin typeface="Times New Roman" pitchFamily="34" charset="0"/>
+                <a:ea typeface="Times New Roman" pitchFamily="34" charset="-122"/>
+                <a:cs typeface="Times New Roman" pitchFamily="34" charset="-120"/>
+              </a:rPr>
+              <a:t>Mediterranean farming: </a:t>
+            </a:r>
+            <a:pPr algn="l" marL="342900" indent="-342900">
+              <a:spcAft>
+                <a:spcPts val="800"/>
+              </a:spcAft>
+              <a:buSzPct val="100000"/>
+              <a:buChar char="•"/>
+            </a:pPr>
+            <a:r>
+              <a:rPr lang="en-US" sz="3600" dirty="0">
+                <a:solidFill>
+                  <a:srgbClr val="111111"/>
+                </a:solidFill>
+                <a:latin typeface="Times New Roman" pitchFamily="34" charset="0"/>
+                <a:ea typeface="Times New Roman" pitchFamily="34" charset="-122"/>
+                <a:cs typeface="Times New Roman" pitchFamily="34" charset="-120"/>
+              </a:rPr>
+              <a:t>Grapes, olives and oranges in Spain and Italy.</a:t>
+            </a:r>
+            <a:endParaRPr lang="en-US" sz="3600" dirty="0"/>
           </a:p>
         </p:txBody>
       </p:sp>
       <p:pic>
         <p:nvPicPr>
-          <p:cNvPr id="3" name="Image 0" descr="/home/claude/f4/img/minesec_sheet.png">    </p:cNvPr>
+          <p:cNvPr id="5" name="Image 0" descr="/home/claude/f4/img/v2/f2t_vineyard.jpg">    </p:cNvPr>
           <p:cNvPicPr>
             <a:picLocks noChangeAspect="1"/>
           </p:cNvPicPr>
@@ -14995,8 +15330,8 @@
         </p:blipFill>
         <p:spPr>
           <a:xfrm>
-            <a:off x="0" y="658368"/>
-            <a:ext cx="5120640" cy="5833872"/>
+            <a:off x="5349240" y="2341107"/>
+            <a:ext cx="6659575" cy="3154193"/>
           </a:xfrm>
           <a:prstGeom prst="rect">
             <a:avLst/>
@@ -15005,14 +15340,14 @@
       </p:pic>
       <p:sp>
         <p:nvSpPr>
-          <p:cNvPr id="4" name="Text 1"/>
+          <p:cNvPr id="6" name="Text 3"/>
           <p:cNvSpPr/>
           <p:nvPr/>
         </p:nvSpPr>
         <p:spPr>
           <a:xfrm>
-            <a:off x="5349240" y="1005840"/>
-            <a:ext cx="6522415" cy="731520"/>
+            <a:off x="5349240" y="6089904"/>
+            <a:ext cx="6659575" cy="347472"/>
           </a:xfrm>
           <a:prstGeom prst="rect">
             <a:avLst/>
@@ -15021,68 +15356,24 @@
           <a:ln/>
         </p:spPr>
         <p:txBody>
-          <a:bodyPr wrap="square" lIns="0" tIns="0" rIns="0" bIns="0" rtlCol="0" anchor="ctr">
-            <a:normAutofit/>
-          </a:bodyPr>
+          <a:bodyPr wrap="square" lIns="0" tIns="0" rIns="0" bIns="0" rtlCol="0" anchor="ctr"/>
           <a:lstStyle/>
           <a:p>
             <a:pPr algn="ctr" indent="0" marL="0">
               <a:buNone/>
             </a:pPr>
             <a:r>
-              <a:rPr lang="en-US" sz="3600" b="1" dirty="0">
-                <a:solidFill>
-                  <a:srgbClr val="990011"/>
+              <a:rPr lang="en-US" sz="1600" i="1" dirty="0">
+                <a:solidFill>
+                  <a:srgbClr val="555555"/>
                 </a:solidFill>
                 <a:latin typeface="Times New Roman" pitchFamily="34" charset="0"/>
                 <a:ea typeface="Times New Roman" pitchFamily="34" charset="-122"/>
                 <a:cs typeface="Times New Roman" pitchFamily="34" charset="-120"/>
               </a:rPr>
-              <a:t>Evaluation 1</a:t>
-            </a:r>
-            <a:endParaRPr lang="en-US" sz="3600" dirty="0"/>
-          </a:p>
-        </p:txBody>
-      </p:sp>
-      <p:sp>
-        <p:nvSpPr>
-          <p:cNvPr id="5" name="Text 2"/>
-          <p:cNvSpPr/>
-          <p:nvPr/>
-        </p:nvSpPr>
-        <p:spPr>
-          <a:xfrm>
-            <a:off x="5349240" y="1783080"/>
-            <a:ext cx="6522415" cy="4663440"/>
-          </a:xfrm>
-          <a:prstGeom prst="rect">
-            <a:avLst/>
-          </a:prstGeom>
-          <a:noFill/>
-          <a:ln/>
-        </p:spPr>
-        <p:txBody>
-          <a:bodyPr wrap="square" lIns="0" tIns="0" rIns="0" bIns="0" rtlCol="0" anchor="t"/>
-          <a:lstStyle/>
-          <a:p>
-            <a:pPr algn="l" indent="0" marL="0">
-              <a:spcAft>
-                <a:spcPts val="800"/>
-              </a:spcAft>
-              <a:buNone/>
-            </a:pPr>
-            <a:r>
-              <a:rPr lang="en-US" sz="4000" dirty="0">
-                <a:solidFill>
-                  <a:srgbClr val="111111"/>
-                </a:solidFill>
-                <a:latin typeface="Times New Roman" pitchFamily="34" charset="0"/>
-                <a:ea typeface="Times New Roman" pitchFamily="34" charset="-122"/>
-                <a:cs typeface="Times New Roman" pitchFamily="34" charset="-120"/>
-              </a:rPr>
-              <a:t>What is mixed farming?</a:t>
-            </a:r>
-            <a:endParaRPr lang="en-US" sz="4000" dirty="0"/>
+              <a:t>Illustration: a vineyard</a:t>
+            </a:r>
+            <a:endParaRPr lang="en-US" sz="1600" dirty="0"/>
           </a:p>
         </p:txBody>
       </p:sp>
@@ -15192,7 +15483,7 @@
                 <a:ea typeface="Calibri" pitchFamily="34" charset="-122"/>
                 <a:cs typeface="Calibri" pitchFamily="34" charset="-120"/>
               </a:rPr>
-              <a:t>FORMATIVE EVALUATION</a:t>
+              <a:t>BOARD SUMMARY</a:t>
             </a:r>
             <a:endParaRPr lang="en-US" sz="1400" dirty="0"/>
           </a:p>
@@ -15257,7 +15548,7 @@
                 <a:ea typeface="Times New Roman" pitchFamily="34" charset="-122"/>
                 <a:cs typeface="Times New Roman" pitchFamily="34" charset="-120"/>
               </a:rPr>
-              <a:t>Expected Answer</a:t>
+              <a:t>Farming in the Temperate Region</a:t>
             </a:r>
             <a:endParaRPr lang="en-US" sz="3600" dirty="0"/>
           </a:p>
@@ -15284,14 +15575,15 @@
           <a:bodyPr wrap="square" lIns="0" tIns="0" rIns="0" bIns="0" rtlCol="0" anchor="t"/>
           <a:lstStyle/>
           <a:p>
-            <a:pPr algn="l" indent="0" marL="0">
+            <a:pPr algn="l" marL="342900" indent="-342900">
               <a:spcAft>
                 <a:spcPts val="800"/>
               </a:spcAft>
-              <a:buNone/>
+              <a:buSzPct val="100000"/>
+              <a:buChar char="•"/>
             </a:pPr>
             <a:r>
-              <a:rPr lang="en-US" sz="4000" dirty="0">
+              <a:rPr lang="en-US" sz="4000" b="1" dirty="0">
                 <a:solidFill>
                   <a:srgbClr val="111111"/>
                 </a:solidFill>
@@ -15299,7 +15591,25 @@
                 <a:ea typeface="Times New Roman" pitchFamily="34" charset="-122"/>
                 <a:cs typeface="Times New Roman" pitchFamily="34" charset="-120"/>
               </a:rPr>
-              <a:t>Growing crops and rearing animals on the same farm.</a:t>
+              <a:t>Why it is productive: </a:t>
+            </a:r>
+            <a:pPr algn="l" marL="342900" indent="-342900">
+              <a:spcAft>
+                <a:spcPts val="800"/>
+              </a:spcAft>
+              <a:buSzPct val="100000"/>
+              <a:buChar char="•"/>
+            </a:pPr>
+            <a:r>
+              <a:rPr lang="en-US" sz="4000" dirty="0">
+                <a:solidFill>
+                  <a:srgbClr val="111111"/>
+                </a:solidFill>
+                <a:latin typeface="Times New Roman" pitchFamily="34" charset="0"/>
+                <a:ea typeface="Times New Roman" pitchFamily="34" charset="-122"/>
+                <a:cs typeface="Times New Roman" pitchFamily="34" charset="-120"/>
+              </a:rPr>
+              <a:t>Machines, fertilisers and good seeds give high yields.</a:t>
             </a:r>
             <a:endParaRPr lang="en-US" sz="4000" dirty="0"/>
           </a:p>
@@ -15476,7 +15786,7 @@
                 <a:ea typeface="Times New Roman" pitchFamily="34" charset="-122"/>
                 <a:cs typeface="Times New Roman" pitchFamily="34" charset="-120"/>
               </a:rPr>
-              <a:t>Evaluation 2</a:t>
+              <a:t>Evaluation 1</a:t>
             </a:r>
             <a:endParaRPr lang="en-US" sz="3600" dirty="0"/>
           </a:p>
@@ -15518,7 +15828,7 @@
                 <a:ea typeface="Times New Roman" pitchFamily="34" charset="-122"/>
                 <a:cs typeface="Times New Roman" pitchFamily="34" charset="-120"/>
               </a:rPr>
-              <a:t>Why do temperate farmers produce a lot?</a:t>
+              <a:t>What is mixed farming?</a:t>
             </a:r>
             <a:endParaRPr lang="en-US" sz="4000" dirty="0"/>
           </a:p>
@@ -15737,7 +16047,7 @@
                 <a:ea typeface="Times New Roman" pitchFamily="34" charset="-122"/>
                 <a:cs typeface="Times New Roman" pitchFamily="34" charset="-120"/>
               </a:rPr>
-              <a:t>They use machines, good seeds and fertilisers.</a:t>
+              <a:t>Growing crops and rearing animals on the same farm.</a:t>
             </a:r>
             <a:endParaRPr lang="en-US" sz="4000" dirty="0"/>
           </a:p>
@@ -15849,7 +16159,7 @@
                 <a:ea typeface="Calibri" pitchFamily="34" charset="-122"/>
                 <a:cs typeface="Calibri" pitchFamily="34" charset="-120"/>
               </a:rPr>
-              <a:t>REMEDIATION</a:t>
+              <a:t>FORMATIVE EVALUATION</a:t>
             </a:r>
             <a:endParaRPr lang="en-US" sz="1400" dirty="0"/>
           </a:p>
@@ -15872,7 +16182,7 @@
         <p:spPr>
           <a:xfrm>
             <a:off x="0" y="658368"/>
-            <a:ext cx="2468880" cy="5833872"/>
+            <a:ext cx="5120640" cy="5833872"/>
           </a:xfrm>
           <a:prstGeom prst="rect">
             <a:avLst/>
@@ -15887,8 +16197,8 @@
         </p:nvSpPr>
         <p:spPr>
           <a:xfrm>
-            <a:off x="2697480" y="1005840"/>
-            <a:ext cx="9174175" cy="731520"/>
+            <a:off x="5349240" y="1005840"/>
+            <a:ext cx="6522415" cy="731520"/>
           </a:xfrm>
           <a:prstGeom prst="rect">
             <a:avLst/>
@@ -15914,7 +16224,7 @@
                 <a:ea typeface="Times New Roman" pitchFamily="34" charset="-122"/>
                 <a:cs typeface="Times New Roman" pitchFamily="34" charset="-120"/>
               </a:rPr>
-              <a:t>Remediation</a:t>
+              <a:t>Evaluation 2</a:t>
             </a:r>
             <a:endParaRPr lang="en-US" sz="3600" dirty="0"/>
           </a:p>
@@ -15928,8 +16238,8 @@
         </p:nvSpPr>
         <p:spPr>
           <a:xfrm>
-            <a:off x="2697480" y="1783080"/>
-            <a:ext cx="9174175" cy="4663440"/>
+            <a:off x="5349240" y="1783080"/>
+            <a:ext cx="6522415" cy="4663440"/>
           </a:xfrm>
           <a:prstGeom prst="rect">
             <a:avLst/>
@@ -15948,7 +16258,7 @@
               <a:buNone/>
             </a:pPr>
             <a:r>
-              <a:rPr lang="en-US" sz="4000" b="1" dirty="0">
+              <a:rPr lang="en-US" sz="4000" dirty="0">
                 <a:solidFill>
                   <a:srgbClr val="111111"/>
                 </a:solidFill>
@@ -15956,73 +16266,7 @@
                 <a:ea typeface="Times New Roman" pitchFamily="34" charset="-122"/>
                 <a:cs typeface="Times New Roman" pitchFamily="34" charset="-120"/>
               </a:rPr>
-              <a:t>Fill in the blanks:</a:t>
-            </a:r>
-            <a:endParaRPr lang="en-US" sz="4000" dirty="0"/>
-          </a:p>
-          <a:p>
-            <a:pPr algn="l" marL="342900" indent="-342900">
-              <a:spcAft>
-                <a:spcPts val="800"/>
-              </a:spcAft>
-              <a:buSzPct val="100000"/>
-              <a:buFont typeface="+mj-lt"/>
-              <a:buAutoNum type="arabicPeriod" startAt="1"/>
-            </a:pPr>
-            <a:r>
-              <a:rPr lang="en-US" sz="4000" dirty="0">
-                <a:solidFill>
-                  <a:srgbClr val="111111"/>
-                </a:solidFill>
-                <a:latin typeface="Times New Roman" pitchFamily="34" charset="0"/>
-                <a:ea typeface="Times New Roman" pitchFamily="34" charset="-122"/>
-                <a:cs typeface="Times New Roman" pitchFamily="34" charset="-120"/>
-              </a:rPr>
-              <a:t>Rearing cows for milk is ______ farming.</a:t>
-            </a:r>
-            <a:endParaRPr lang="en-US" sz="4000" dirty="0"/>
-          </a:p>
-          <a:p>
-            <a:pPr algn="l" marL="342900" indent="-342900">
-              <a:spcAft>
-                <a:spcPts val="800"/>
-              </a:spcAft>
-              <a:buSzPct val="100000"/>
-              <a:buFont typeface="+mj-lt"/>
-              <a:buAutoNum type="arabicPeriod" startAt="1"/>
-            </a:pPr>
-            <a:r>
-              <a:rPr lang="en-US" sz="4000" dirty="0">
-                <a:solidFill>
-                  <a:srgbClr val="111111"/>
-                </a:solidFill>
-                <a:latin typeface="Times New Roman" pitchFamily="34" charset="0"/>
-                <a:ea typeface="Times New Roman" pitchFamily="34" charset="-122"/>
-                <a:cs typeface="Times New Roman" pitchFamily="34" charset="-120"/>
-              </a:rPr>
-              <a:t>A very large farm for animals is a ______.</a:t>
-            </a:r>
-            <a:endParaRPr lang="en-US" sz="4000" dirty="0"/>
-          </a:p>
-          <a:p>
-            <a:pPr algn="l" marL="342900" indent="-342900">
-              <a:spcAft>
-                <a:spcPts val="800"/>
-              </a:spcAft>
-              <a:buSzPct val="100000"/>
-              <a:buFont typeface="+mj-lt"/>
-              <a:buAutoNum type="arabicPeriod" startAt="1"/>
-            </a:pPr>
-            <a:r>
-              <a:rPr lang="en-US" sz="4000" dirty="0">
-                <a:solidFill>
-                  <a:srgbClr val="111111"/>
-                </a:solidFill>
-                <a:latin typeface="Times New Roman" pitchFamily="34" charset="0"/>
-                <a:ea typeface="Times New Roman" pitchFamily="34" charset="-122"/>
-                <a:cs typeface="Times New Roman" pitchFamily="34" charset="-120"/>
-              </a:rPr>
-              <a:t>Wheat is harvested by a big ______.</a:t>
+              <a:t>Why do temperate farmers produce a lot?</a:t>
             </a:r>
             <a:endParaRPr lang="en-US" sz="4000" dirty="0"/>
           </a:p>
@@ -16134,7 +16378,7 @@
                 <a:ea typeface="Calibri" pitchFamily="34" charset="-122"/>
                 <a:cs typeface="Calibri" pitchFamily="34" charset="-120"/>
               </a:rPr>
-              <a:t>HOMEWORK</a:t>
+              <a:t>FORMATIVE EVALUATION</a:t>
             </a:r>
             <a:endParaRPr lang="en-US" sz="1400" dirty="0"/>
           </a:p>
@@ -16199,7 +16443,7 @@
                 <a:ea typeface="Times New Roman" pitchFamily="34" charset="-122"/>
                 <a:cs typeface="Times New Roman" pitchFamily="34" charset="-120"/>
               </a:rPr>
-              <a:t>Homework</a:t>
+              <a:t>Expected Answer</a:t>
             </a:r>
             <a:endParaRPr lang="en-US" sz="3600" dirty="0"/>
           </a:p>
@@ -16241,7 +16485,7 @@
                 <a:ea typeface="Times New Roman" pitchFamily="34" charset="-122"/>
                 <a:cs typeface="Times New Roman" pitchFamily="34" charset="-120"/>
               </a:rPr>
-              <a:t>Ask an adult who has lived or travelled in Europe what difficulties people face in winter. Write down two of them.</a:t>
+              <a:t>They use machines, good seeds and fertilisers.</a:t>
             </a:r>
             <a:endParaRPr lang="en-US" sz="4000" dirty="0"/>
           </a:p>
@@ -16353,7 +16597,7 @@
                 <a:ea typeface="Calibri" pitchFamily="34" charset="-122"/>
                 <a:cs typeface="Calibri" pitchFamily="34" charset="-120"/>
               </a:rPr>
-              <a:t>NEXT LESSON</a:t>
+              <a:t>REMEDIATION</a:t>
             </a:r>
             <a:endParaRPr lang="en-US" sz="1400" dirty="0"/>
           </a:p>
@@ -16376,7 +16620,7 @@
         <p:spPr>
           <a:xfrm>
             <a:off x="0" y="658368"/>
-            <a:ext cx="5120640" cy="5833872"/>
+            <a:ext cx="2468880" cy="5833872"/>
           </a:xfrm>
           <a:prstGeom prst="rect">
             <a:avLst/>
@@ -16391,8 +16635,8 @@
         </p:nvSpPr>
         <p:spPr>
           <a:xfrm>
-            <a:off x="5349240" y="1005840"/>
-            <a:ext cx="6522415" cy="731520"/>
+            <a:off x="2697480" y="1005840"/>
+            <a:ext cx="9174175" cy="731520"/>
           </a:xfrm>
           <a:prstGeom prst="rect">
             <a:avLst/>
@@ -16418,7 +16662,7 @@
                 <a:ea typeface="Times New Roman" pitchFamily="34" charset="-122"/>
                 <a:cs typeface="Times New Roman" pitchFamily="34" charset="-120"/>
               </a:rPr>
-              <a:t>Next Lesson</a:t>
+              <a:t>Remediation</a:t>
             </a:r>
             <a:endParaRPr lang="en-US" sz="3600" dirty="0"/>
           </a:p>
@@ -16432,8 +16676,8 @@
         </p:nvSpPr>
         <p:spPr>
           <a:xfrm>
-            <a:off x="5349240" y="1783080"/>
-            <a:ext cx="6522415" cy="4663440"/>
+            <a:off x="2697480" y="1783080"/>
+            <a:ext cx="9174175" cy="4663440"/>
           </a:xfrm>
           <a:prstGeom prst="rect">
             <a:avLst/>
@@ -16442,10 +16686,10 @@
           <a:ln/>
         </p:spPr>
         <p:txBody>
-          <a:bodyPr wrap="square" lIns="0" tIns="0" rIns="0" bIns="0" rtlCol="0" anchor="ctr"/>
-          <a:lstStyle/>
-          <a:p>
-            <a:pPr algn="ctr" indent="0" marL="0">
+          <a:bodyPr wrap="square" lIns="0" tIns="0" rIns="0" bIns="0" rtlCol="0" anchor="t"/>
+          <a:lstStyle/>
+          <a:p>
+            <a:pPr algn="l" indent="0" marL="0">
               <a:spcAft>
                 <a:spcPts val="800"/>
               </a:spcAft>
@@ -16460,27 +16704,73 @@
                 <a:ea typeface="Times New Roman" pitchFamily="34" charset="-122"/>
                 <a:cs typeface="Times New Roman" pitchFamily="34" charset="-120"/>
               </a:rPr>
-              <a:t>Our next lesson will be on:</a:t>
+              <a:t>Fill in the blanks:</a:t>
             </a:r>
             <a:endParaRPr lang="en-US" sz="4000" dirty="0"/>
           </a:p>
           <a:p>
-            <a:pPr algn="ctr" indent="0" marL="0">
+            <a:pPr algn="l" marL="342900" indent="-342900">
               <a:spcAft>
                 <a:spcPts val="800"/>
               </a:spcAft>
-              <a:buNone/>
+              <a:buSzPct val="100000"/>
+              <a:buFont typeface="+mj-lt"/>
+              <a:buAutoNum type="arabicPeriod" startAt="1"/>
             </a:pPr>
             <a:r>
-              <a:rPr lang="en-US" sz="4000" b="1" dirty="0">
-                <a:solidFill>
-                  <a:srgbClr val="990011"/>
+              <a:rPr lang="en-US" sz="4000" dirty="0">
+                <a:solidFill>
+                  <a:srgbClr val="111111"/>
                 </a:solidFill>
                 <a:latin typeface="Times New Roman" pitchFamily="34" charset="0"/>
                 <a:ea typeface="Times New Roman" pitchFamily="34" charset="-122"/>
                 <a:cs typeface="Times New Roman" pitchFamily="34" charset="-120"/>
               </a:rPr>
-              <a:t>Lesson 4 (Part 4): The Temperate Region: Problems Faced and Adaptations</a:t>
+              <a:t>Rearing cows for milk is ______ farming.</a:t>
+            </a:r>
+            <a:endParaRPr lang="en-US" sz="4000" dirty="0"/>
+          </a:p>
+          <a:p>
+            <a:pPr algn="l" marL="342900" indent="-342900">
+              <a:spcAft>
+                <a:spcPts val="800"/>
+              </a:spcAft>
+              <a:buSzPct val="100000"/>
+              <a:buFont typeface="+mj-lt"/>
+              <a:buAutoNum type="arabicPeriod" startAt="1"/>
+            </a:pPr>
+            <a:r>
+              <a:rPr lang="en-US" sz="4000" dirty="0">
+                <a:solidFill>
+                  <a:srgbClr val="111111"/>
+                </a:solidFill>
+                <a:latin typeface="Times New Roman" pitchFamily="34" charset="0"/>
+                <a:ea typeface="Times New Roman" pitchFamily="34" charset="-122"/>
+                <a:cs typeface="Times New Roman" pitchFamily="34" charset="-120"/>
+              </a:rPr>
+              <a:t>A very large farm for animals is a ______.</a:t>
+            </a:r>
+            <a:endParaRPr lang="en-US" sz="4000" dirty="0"/>
+          </a:p>
+          <a:p>
+            <a:pPr algn="l" marL="342900" indent="-342900">
+              <a:spcAft>
+                <a:spcPts val="800"/>
+              </a:spcAft>
+              <a:buSzPct val="100000"/>
+              <a:buFont typeface="+mj-lt"/>
+              <a:buAutoNum type="arabicPeriod" startAt="1"/>
+            </a:pPr>
+            <a:r>
+              <a:rPr lang="en-US" sz="4000" dirty="0">
+                <a:solidFill>
+                  <a:srgbClr val="111111"/>
+                </a:solidFill>
+                <a:latin typeface="Times New Roman" pitchFamily="34" charset="0"/>
+                <a:ea typeface="Times New Roman" pitchFamily="34" charset="-122"/>
+                <a:cs typeface="Times New Roman" pitchFamily="34" charset="-120"/>
+              </a:rPr>
+              <a:t>Wheat is harvested by a big ______.</a:t>
             </a:r>
             <a:endParaRPr lang="en-US" sz="4000" dirty="0"/>
           </a:p>
@@ -16592,6 +16882,464 @@
                 <a:ea typeface="Calibri" pitchFamily="34" charset="-122"/>
                 <a:cs typeface="Calibri" pitchFamily="34" charset="-120"/>
               </a:rPr>
+              <a:t>HOMEWORK</a:t>
+            </a:r>
+            <a:endParaRPr lang="en-US" sz="1400" dirty="0"/>
+          </a:p>
+        </p:txBody>
+      </p:sp>
+      <p:pic>
+        <p:nvPicPr>
+          <p:cNvPr id="3" name="Image 0" descr="/home/claude/f4/img/minesec_sheet.png">    </p:cNvPr>
+          <p:cNvPicPr>
+            <a:picLocks noChangeAspect="1"/>
+          </p:cNvPicPr>
+          <p:nvPr/>
+        </p:nvPicPr>
+        <p:blipFill>
+          <a:blip r:embed="rId1"/>
+          <a:stretch>
+            <a:fillRect/>
+          </a:stretch>
+        </p:blipFill>
+        <p:spPr>
+          <a:xfrm>
+            <a:off x="0" y="658368"/>
+            <a:ext cx="5120640" cy="5833872"/>
+          </a:xfrm>
+          <a:prstGeom prst="rect">
+            <a:avLst/>
+          </a:prstGeom>
+        </p:spPr>
+      </p:pic>
+      <p:sp>
+        <p:nvSpPr>
+          <p:cNvPr id="4" name="Text 1"/>
+          <p:cNvSpPr/>
+          <p:nvPr/>
+        </p:nvSpPr>
+        <p:spPr>
+          <a:xfrm>
+            <a:off x="5349240" y="1005840"/>
+            <a:ext cx="6522415" cy="731520"/>
+          </a:xfrm>
+          <a:prstGeom prst="rect">
+            <a:avLst/>
+          </a:prstGeom>
+          <a:noFill/>
+          <a:ln/>
+        </p:spPr>
+        <p:txBody>
+          <a:bodyPr wrap="square" lIns="0" tIns="0" rIns="0" bIns="0" rtlCol="0" anchor="ctr">
+            <a:normAutofit/>
+          </a:bodyPr>
+          <a:lstStyle/>
+          <a:p>
+            <a:pPr algn="ctr" indent="0" marL="0">
+              <a:buNone/>
+            </a:pPr>
+            <a:r>
+              <a:rPr lang="en-US" sz="3600" b="1" dirty="0">
+                <a:solidFill>
+                  <a:srgbClr val="990011"/>
+                </a:solidFill>
+                <a:latin typeface="Times New Roman" pitchFamily="34" charset="0"/>
+                <a:ea typeface="Times New Roman" pitchFamily="34" charset="-122"/>
+                <a:cs typeface="Times New Roman" pitchFamily="34" charset="-120"/>
+              </a:rPr>
+              <a:t>Homework</a:t>
+            </a:r>
+            <a:endParaRPr lang="en-US" sz="3600" dirty="0"/>
+          </a:p>
+        </p:txBody>
+      </p:sp>
+      <p:sp>
+        <p:nvSpPr>
+          <p:cNvPr id="5" name="Text 2"/>
+          <p:cNvSpPr/>
+          <p:nvPr/>
+        </p:nvSpPr>
+        <p:spPr>
+          <a:xfrm>
+            <a:off x="5349240" y="1783080"/>
+            <a:ext cx="6522415" cy="4663440"/>
+          </a:xfrm>
+          <a:prstGeom prst="rect">
+            <a:avLst/>
+          </a:prstGeom>
+          <a:noFill/>
+          <a:ln/>
+        </p:spPr>
+        <p:txBody>
+          <a:bodyPr wrap="square" lIns="0" tIns="0" rIns="0" bIns="0" rtlCol="0" anchor="t"/>
+          <a:lstStyle/>
+          <a:p>
+            <a:pPr algn="l" indent="0" marL="0">
+              <a:spcAft>
+                <a:spcPts val="800"/>
+              </a:spcAft>
+              <a:buNone/>
+            </a:pPr>
+            <a:r>
+              <a:rPr lang="en-US" sz="4000" dirty="0">
+                <a:solidFill>
+                  <a:srgbClr val="111111"/>
+                </a:solidFill>
+                <a:latin typeface="Times New Roman" pitchFamily="34" charset="0"/>
+                <a:ea typeface="Times New Roman" pitchFamily="34" charset="-122"/>
+                <a:cs typeface="Times New Roman" pitchFamily="34" charset="-120"/>
+              </a:rPr>
+              <a:t>Ask an adult who has lived or travelled in Europe what difficulties people face in winter. Write down two of them.</a:t>
+            </a:r>
+            <a:endParaRPr lang="en-US" sz="4000" dirty="0"/>
+          </a:p>
+        </p:txBody>
+      </p:sp>
+      <p:sp>
+        <p:nvSpPr>
+          <p:cNvPr id="25" name="Slide Number Placeholder 0"/>
+          <p:cNvSpPr>
+            <a:spLocks noGrp="1"/>
+          </p:cNvSpPr>
+          <p:nvPr>
+            <p:ph type="sldNum" sz="quarter" idx="4294967295"/>
+          </p:nvPr>
+        </p:nvSpPr>
+        <p:spPr>
+          <a:xfrm>
+            <a:off x="27432" y="91440"/>
+            <a:ext cx="585216" cy="475488"/>
+          </a:xfrm>
+          <a:prstGeom prst="rect">
+            <a:avLst/>
+          </a:prstGeom>
+          <a:extLst>
+            <a:ext uri="{C572A759-6A51-4108-AA02-DFA0A04FC94B}">
+              <ma14:wrappingTextBoxFlag xmlns:ma14="http://schemas.microsoft.com/office/mac/drawingml/2011/main" val="0"/>
+            </a:ext>
+          </a:extLst>
+        </p:spPr>
+        <p:txBody>
+          <a:bodyPr/>
+          <a:lstStyle>
+            <a:lvl1pPr>
+              <a:defRPr sz="2000">
+                <a:solidFill>
+                  <a:srgbClr val="FFFFFF"/>
+                </a:solidFill>
+                <a:latin typeface="Calibri"/>
+                <a:ea typeface="Calibri"/>
+                <a:cs typeface="Calibri"/>
+              </a:defRPr>
+            </a:lvl1pPr>
+          </a:lstStyle>
+          <a:p>
+            <a:pPr algn="ctr"/>
+            <a:fld id="{F7021451-1387-4CA6-816F-3879F97B5CBC}" type="slidenum">
+              <a:rPr b="1" lang="en-US"/>
+              <a:t>47</a:t>
+            </a:fld>
+            <a:endParaRPr lang="en-US"/>
+          </a:p>
+        </p:txBody>
+      </p:sp>
+    </p:spTree>
+  </p:cSld>
+  <p:clrMapOvr>
+    <a:masterClrMapping/>
+  </p:clrMapOvr>
+</p:sld>
+</file>
+
+<file path=ppt/slides/slide48.xml><?xml version="1.0" encoding="utf-8"?>
+<p:sld xmlns:a="http://schemas.openxmlformats.org/drawingml/2006/main" xmlns:r="http://schemas.openxmlformats.org/officeDocument/2006/relationships" xmlns:p="http://schemas.openxmlformats.org/presentationml/2006/main">
+  <p:cSld name="Slide 48">
+    <p:spTree>
+      <p:nvGrpSpPr>
+        <p:cNvPr id="1" name=""/>
+        <p:cNvGrpSpPr/>
+        <p:nvPr/>
+      </p:nvGrpSpPr>
+      <p:grpSpPr>
+        <a:xfrm>
+          <a:off x="0" y="0"/>
+          <a:ext cx="0" cy="0"/>
+          <a:chOff x="0" y="0"/>
+          <a:chExt cx="0" cy="0"/>
+        </a:xfrm>
+      </p:grpSpPr>
+      <p:sp>
+        <p:nvSpPr>
+          <p:cNvPr id="2" name="Text 0"/>
+          <p:cNvSpPr/>
+          <p:nvPr/>
+        </p:nvSpPr>
+        <p:spPr>
+          <a:xfrm>
+            <a:off x="457200" y="713232"/>
+            <a:ext cx="11368735" cy="274320"/>
+          </a:xfrm>
+          <a:prstGeom prst="rect">
+            <a:avLst/>
+          </a:prstGeom>
+          <a:noFill/>
+          <a:ln/>
+        </p:spPr>
+        <p:txBody>
+          <a:bodyPr wrap="square" lIns="0" tIns="0" rIns="0" bIns="0" rtlCol="0" anchor="ctr"/>
+          <a:lstStyle/>
+          <a:p>
+            <a:pPr algn="r" indent="0" marL="0">
+              <a:buNone/>
+            </a:pPr>
+            <a:r>
+              <a:rPr lang="en-US" sz="1400" b="1" dirty="0">
+                <a:solidFill>
+                  <a:srgbClr val="1C3F6E"/>
+                </a:solidFill>
+                <a:latin typeface="Calibri" pitchFamily="34" charset="0"/>
+                <a:ea typeface="Calibri" pitchFamily="34" charset="-122"/>
+                <a:cs typeface="Calibri" pitchFamily="34" charset="-120"/>
+              </a:rPr>
+              <a:t>NEXT LESSON</a:t>
+            </a:r>
+            <a:endParaRPr lang="en-US" sz="1400" dirty="0"/>
+          </a:p>
+        </p:txBody>
+      </p:sp>
+      <p:pic>
+        <p:nvPicPr>
+          <p:cNvPr id="3" name="Image 0" descr="/home/claude/f4/img/minesec_sheet.png">    </p:cNvPr>
+          <p:cNvPicPr>
+            <a:picLocks noChangeAspect="1"/>
+          </p:cNvPicPr>
+          <p:nvPr/>
+        </p:nvPicPr>
+        <p:blipFill>
+          <a:blip r:embed="rId1"/>
+          <a:stretch>
+            <a:fillRect/>
+          </a:stretch>
+        </p:blipFill>
+        <p:spPr>
+          <a:xfrm>
+            <a:off x="0" y="658368"/>
+            <a:ext cx="5120640" cy="5833872"/>
+          </a:xfrm>
+          <a:prstGeom prst="rect">
+            <a:avLst/>
+          </a:prstGeom>
+        </p:spPr>
+      </p:pic>
+      <p:sp>
+        <p:nvSpPr>
+          <p:cNvPr id="4" name="Text 1"/>
+          <p:cNvSpPr/>
+          <p:nvPr/>
+        </p:nvSpPr>
+        <p:spPr>
+          <a:xfrm>
+            <a:off x="5349240" y="1005840"/>
+            <a:ext cx="6522415" cy="731520"/>
+          </a:xfrm>
+          <a:prstGeom prst="rect">
+            <a:avLst/>
+          </a:prstGeom>
+          <a:noFill/>
+          <a:ln/>
+        </p:spPr>
+        <p:txBody>
+          <a:bodyPr wrap="square" lIns="0" tIns="0" rIns="0" bIns="0" rtlCol="0" anchor="ctr">
+            <a:normAutofit/>
+          </a:bodyPr>
+          <a:lstStyle/>
+          <a:p>
+            <a:pPr algn="ctr" indent="0" marL="0">
+              <a:buNone/>
+            </a:pPr>
+            <a:r>
+              <a:rPr lang="en-US" sz="3600" b="1" dirty="0">
+                <a:solidFill>
+                  <a:srgbClr val="990011"/>
+                </a:solidFill>
+                <a:latin typeface="Times New Roman" pitchFamily="34" charset="0"/>
+                <a:ea typeface="Times New Roman" pitchFamily="34" charset="-122"/>
+                <a:cs typeface="Times New Roman" pitchFamily="34" charset="-120"/>
+              </a:rPr>
+              <a:t>Next Lesson</a:t>
+            </a:r>
+            <a:endParaRPr lang="en-US" sz="3600" dirty="0"/>
+          </a:p>
+        </p:txBody>
+      </p:sp>
+      <p:sp>
+        <p:nvSpPr>
+          <p:cNvPr id="5" name="Text 2"/>
+          <p:cNvSpPr/>
+          <p:nvPr/>
+        </p:nvSpPr>
+        <p:spPr>
+          <a:xfrm>
+            <a:off x="5349240" y="1783080"/>
+            <a:ext cx="6522415" cy="4663440"/>
+          </a:xfrm>
+          <a:prstGeom prst="rect">
+            <a:avLst/>
+          </a:prstGeom>
+          <a:noFill/>
+          <a:ln/>
+        </p:spPr>
+        <p:txBody>
+          <a:bodyPr wrap="square" lIns="0" tIns="0" rIns="0" bIns="0" rtlCol="0" anchor="ctr"/>
+          <a:lstStyle/>
+          <a:p>
+            <a:pPr algn="ctr" indent="0" marL="0">
+              <a:spcAft>
+                <a:spcPts val="800"/>
+              </a:spcAft>
+              <a:buNone/>
+            </a:pPr>
+            <a:r>
+              <a:rPr lang="en-US" sz="4000" b="1" dirty="0">
+                <a:solidFill>
+                  <a:srgbClr val="111111"/>
+                </a:solidFill>
+                <a:latin typeface="Times New Roman" pitchFamily="34" charset="0"/>
+                <a:ea typeface="Times New Roman" pitchFamily="34" charset="-122"/>
+                <a:cs typeface="Times New Roman" pitchFamily="34" charset="-120"/>
+              </a:rPr>
+              <a:t>Our next lesson will be on:</a:t>
+            </a:r>
+            <a:endParaRPr lang="en-US" sz="4000" dirty="0"/>
+          </a:p>
+          <a:p>
+            <a:pPr algn="ctr" indent="0" marL="0">
+              <a:spcAft>
+                <a:spcPts val="800"/>
+              </a:spcAft>
+              <a:buNone/>
+            </a:pPr>
+            <a:r>
+              <a:rPr lang="en-US" sz="4000" b="1" dirty="0">
+                <a:solidFill>
+                  <a:srgbClr val="990011"/>
+                </a:solidFill>
+                <a:latin typeface="Times New Roman" pitchFamily="34" charset="0"/>
+                <a:ea typeface="Times New Roman" pitchFamily="34" charset="-122"/>
+                <a:cs typeface="Times New Roman" pitchFamily="34" charset="-120"/>
+              </a:rPr>
+              <a:t>Lesson 4 (Part 4): The Temperate Region: Problems Faced and Adaptations</a:t>
+            </a:r>
+            <a:endParaRPr lang="en-US" sz="4000" dirty="0"/>
+          </a:p>
+        </p:txBody>
+      </p:sp>
+      <p:sp>
+        <p:nvSpPr>
+          <p:cNvPr id="25" name="Slide Number Placeholder 0"/>
+          <p:cNvSpPr>
+            <a:spLocks noGrp="1"/>
+          </p:cNvSpPr>
+          <p:nvPr>
+            <p:ph type="sldNum" sz="quarter" idx="4294967295"/>
+          </p:nvPr>
+        </p:nvSpPr>
+        <p:spPr>
+          <a:xfrm>
+            <a:off x="27432" y="91440"/>
+            <a:ext cx="585216" cy="475488"/>
+          </a:xfrm>
+          <a:prstGeom prst="rect">
+            <a:avLst/>
+          </a:prstGeom>
+          <a:extLst>
+            <a:ext uri="{C572A759-6A51-4108-AA02-DFA0A04FC94B}">
+              <ma14:wrappingTextBoxFlag xmlns:ma14="http://schemas.microsoft.com/office/mac/drawingml/2011/main" val="0"/>
+            </a:ext>
+          </a:extLst>
+        </p:spPr>
+        <p:txBody>
+          <a:bodyPr/>
+          <a:lstStyle>
+            <a:lvl1pPr>
+              <a:defRPr sz="2000">
+                <a:solidFill>
+                  <a:srgbClr val="FFFFFF"/>
+                </a:solidFill>
+                <a:latin typeface="Calibri"/>
+                <a:ea typeface="Calibri"/>
+                <a:cs typeface="Calibri"/>
+              </a:defRPr>
+            </a:lvl1pPr>
+          </a:lstStyle>
+          <a:p>
+            <a:pPr algn="ctr"/>
+            <a:fld id="{F7021451-1387-4CA6-816F-3879F97B5CBC}" type="slidenum">
+              <a:rPr b="1" lang="en-US"/>
+              <a:t>48</a:t>
+            </a:fld>
+            <a:endParaRPr lang="en-US"/>
+          </a:p>
+        </p:txBody>
+      </p:sp>
+    </p:spTree>
+  </p:cSld>
+  <p:clrMapOvr>
+    <a:masterClrMapping/>
+  </p:clrMapOvr>
+</p:sld>
+</file>
+
+<file path=ppt/slides/slide49.xml><?xml version="1.0" encoding="utf-8"?>
+<p:sld xmlns:a="http://schemas.openxmlformats.org/drawingml/2006/main" xmlns:r="http://schemas.openxmlformats.org/officeDocument/2006/relationships" xmlns:p="http://schemas.openxmlformats.org/presentationml/2006/main">
+  <p:cSld name="Slide 49">
+    <p:spTree>
+      <p:nvGrpSpPr>
+        <p:cNvPr id="1" name=""/>
+        <p:cNvGrpSpPr/>
+        <p:nvPr/>
+      </p:nvGrpSpPr>
+      <p:grpSpPr>
+        <a:xfrm>
+          <a:off x="0" y="0"/>
+          <a:ext cx="0" cy="0"/>
+          <a:chOff x="0" y="0"/>
+          <a:chExt cx="0" cy="0"/>
+        </a:xfrm>
+      </p:grpSpPr>
+      <p:sp>
+        <p:nvSpPr>
+          <p:cNvPr id="2" name="Text 0"/>
+          <p:cNvSpPr/>
+          <p:nvPr/>
+        </p:nvSpPr>
+        <p:spPr>
+          <a:xfrm>
+            <a:off x="457200" y="713232"/>
+            <a:ext cx="11368735" cy="274320"/>
+          </a:xfrm>
+          <a:prstGeom prst="rect">
+            <a:avLst/>
+          </a:prstGeom>
+          <a:noFill/>
+          <a:ln/>
+        </p:spPr>
+        <p:txBody>
+          <a:bodyPr wrap="square" lIns="0" tIns="0" rIns="0" bIns="0" rtlCol="0" anchor="ctr"/>
+          <a:lstStyle/>
+          <a:p>
+            <a:pPr algn="r" indent="0" marL="0">
+              <a:buNone/>
+            </a:pPr>
+            <a:r>
+              <a:rPr lang="en-US" sz="1400" b="1" dirty="0">
+                <a:solidFill>
+                  <a:srgbClr val="1C3F6E"/>
+                </a:solidFill>
+                <a:latin typeface="Calibri" pitchFamily="34" charset="0"/>
+                <a:ea typeface="Calibri" pitchFamily="34" charset="-122"/>
+                <a:cs typeface="Calibri" pitchFamily="34" charset="-120"/>
+              </a:rPr>
               <a:t>BILINGUAL GAME</a:t>
             </a:r>
             <a:endParaRPr lang="en-US" sz="1400" dirty="0"/>
@@ -16639,7 +17387,7 @@
       </p:sp>
       <p:graphicFrame>
         <p:nvGraphicFramePr>
-          <p:cNvPr id="48" name="Table 0"/>
+          <p:cNvPr id="50" name="Table 0"/>
           <p:cNvGraphicFramePr>
             <a:graphicFrameLocks noGrp="1"/>
           </p:cNvGraphicFramePr>
@@ -17951,7 +18699,7 @@
             <a:pPr algn="ctr"/>
             <a:fld id="{F7021451-1387-4CA6-816F-3879F97B5CBC}" type="slidenum">
               <a:rPr b="1" lang="en-US"/>
-              <a:t>47</a:t>
+              <a:t>49</a:t>
             </a:fld>
             <a:endParaRPr lang="en-US"/>
           </a:p>
@@ -17965,9 +18713,9 @@
 </p:sld>
 </file>
 
-<file path=ppt/slides/slide48.xml><?xml version="1.0" encoding="utf-8"?>
+<file path=ppt/slides/slide5.xml><?xml version="1.0" encoding="utf-8"?>
 <p:sld xmlns:a="http://schemas.openxmlformats.org/drawingml/2006/main" xmlns:r="http://schemas.openxmlformats.org/officeDocument/2006/relationships" xmlns:p="http://schemas.openxmlformats.org/presentationml/2006/main">
-  <p:cSld name="Slide 48">
+  <p:cSld name="Slide 5">
     <p:spTree>
       <p:nvGrpSpPr>
         <p:cNvPr id="1" name=""/>
@@ -18015,6 +18763,225 @@
                 <a:ea typeface="Calibri" pitchFamily="34" charset="-122"/>
                 <a:cs typeface="Calibri" pitchFamily="34" charset="-120"/>
               </a:rPr>
+              <a:t>HOMEWORK CORRECTION</a:t>
+            </a:r>
+            <a:endParaRPr lang="en-US" sz="1400" dirty="0"/>
+          </a:p>
+        </p:txBody>
+      </p:sp>
+      <p:pic>
+        <p:nvPicPr>
+          <p:cNvPr id="3" name="Image 0" descr="/home/claude/f4/img/minesec_sheet.png">    </p:cNvPr>
+          <p:cNvPicPr>
+            <a:picLocks noChangeAspect="1"/>
+          </p:cNvPicPr>
+          <p:nvPr/>
+        </p:nvPicPr>
+        <p:blipFill>
+          <a:blip r:embed="rId1"/>
+          <a:stretch>
+            <a:fillRect/>
+          </a:stretch>
+        </p:blipFill>
+        <p:spPr>
+          <a:xfrm>
+            <a:off x="0" y="658368"/>
+            <a:ext cx="5120640" cy="5833872"/>
+          </a:xfrm>
+          <a:prstGeom prst="rect">
+            <a:avLst/>
+          </a:prstGeom>
+        </p:spPr>
+      </p:pic>
+      <p:sp>
+        <p:nvSpPr>
+          <p:cNvPr id="4" name="Text 1"/>
+          <p:cNvSpPr/>
+          <p:nvPr/>
+        </p:nvSpPr>
+        <p:spPr>
+          <a:xfrm>
+            <a:off x="5349240" y="1005840"/>
+            <a:ext cx="6522415" cy="731520"/>
+          </a:xfrm>
+          <a:prstGeom prst="rect">
+            <a:avLst/>
+          </a:prstGeom>
+          <a:noFill/>
+          <a:ln/>
+        </p:spPr>
+        <p:txBody>
+          <a:bodyPr wrap="square" lIns="0" tIns="0" rIns="0" bIns="0" rtlCol="0" anchor="ctr">
+            <a:normAutofit/>
+          </a:bodyPr>
+          <a:lstStyle/>
+          <a:p>
+            <a:pPr algn="ctr" indent="0" marL="0">
+              <a:buNone/>
+            </a:pPr>
+            <a:r>
+              <a:rPr lang="en-US" sz="3600" b="1" dirty="0">
+                <a:solidFill>
+                  <a:srgbClr val="990011"/>
+                </a:solidFill>
+                <a:latin typeface="Times New Roman" pitchFamily="34" charset="0"/>
+                <a:ea typeface="Times New Roman" pitchFamily="34" charset="-122"/>
+                <a:cs typeface="Times New Roman" pitchFamily="34" charset="-120"/>
+              </a:rPr>
+              <a:t>Correction: Possible Answer</a:t>
+            </a:r>
+            <a:endParaRPr lang="en-US" sz="3600" dirty="0"/>
+          </a:p>
+        </p:txBody>
+      </p:sp>
+      <p:sp>
+        <p:nvSpPr>
+          <p:cNvPr id="5" name="Text 2"/>
+          <p:cNvSpPr/>
+          <p:nvPr/>
+        </p:nvSpPr>
+        <p:spPr>
+          <a:xfrm>
+            <a:off x="5349240" y="1783080"/>
+            <a:ext cx="6522415" cy="4663440"/>
+          </a:xfrm>
+          <a:prstGeom prst="rect">
+            <a:avLst/>
+          </a:prstGeom>
+          <a:noFill/>
+          <a:ln/>
+        </p:spPr>
+        <p:txBody>
+          <a:bodyPr wrap="square" lIns="0" tIns="0" rIns="0" bIns="0" rtlCol="0" anchor="t"/>
+          <a:lstStyle/>
+          <a:p>
+            <a:pPr algn="l" indent="0" marL="0">
+              <a:spcAft>
+                <a:spcPts val="800"/>
+              </a:spcAft>
+              <a:buNone/>
+            </a:pPr>
+            <a:r>
+              <a:rPr lang="en-US" sz="4000" dirty="0">
+                <a:solidFill>
+                  <a:srgbClr val="111111"/>
+                </a:solidFill>
+                <a:latin typeface="Times New Roman" pitchFamily="34" charset="0"/>
+                <a:ea typeface="Times New Roman" pitchFamily="34" charset="-122"/>
+                <a:cs typeface="Times New Roman" pitchFamily="34" charset="-120"/>
+              </a:rPr>
+              <a:t>Examples: wheat flour (from France or Canada), powdered milk (from Europe), apples (from France or South Africa), frozen chicken and onions (from Europe).</a:t>
+            </a:r>
+            <a:endParaRPr lang="en-US" sz="4000" dirty="0"/>
+          </a:p>
+        </p:txBody>
+      </p:sp>
+      <p:sp>
+        <p:nvSpPr>
+          <p:cNvPr id="25" name="Slide Number Placeholder 0"/>
+          <p:cNvSpPr>
+            <a:spLocks noGrp="1"/>
+          </p:cNvSpPr>
+          <p:nvPr>
+            <p:ph type="sldNum" sz="quarter" idx="4294967295"/>
+          </p:nvPr>
+        </p:nvSpPr>
+        <p:spPr>
+          <a:xfrm>
+            <a:off x="27432" y="91440"/>
+            <a:ext cx="585216" cy="475488"/>
+          </a:xfrm>
+          <a:prstGeom prst="rect">
+            <a:avLst/>
+          </a:prstGeom>
+          <a:extLst>
+            <a:ext uri="{C572A759-6A51-4108-AA02-DFA0A04FC94B}">
+              <ma14:wrappingTextBoxFlag xmlns:ma14="http://schemas.microsoft.com/office/mac/drawingml/2011/main" val="0"/>
+            </a:ext>
+          </a:extLst>
+        </p:spPr>
+        <p:txBody>
+          <a:bodyPr/>
+          <a:lstStyle>
+            <a:lvl1pPr>
+              <a:defRPr sz="2000">
+                <a:solidFill>
+                  <a:srgbClr val="FFFFFF"/>
+                </a:solidFill>
+                <a:latin typeface="Calibri"/>
+                <a:ea typeface="Calibri"/>
+                <a:cs typeface="Calibri"/>
+              </a:defRPr>
+            </a:lvl1pPr>
+          </a:lstStyle>
+          <a:p>
+            <a:pPr algn="ctr"/>
+            <a:fld id="{F7021451-1387-4CA6-816F-3879F97B5CBC}" type="slidenum">
+              <a:rPr b="1" lang="en-US"/>
+              <a:t>5</a:t>
+            </a:fld>
+            <a:endParaRPr lang="en-US"/>
+          </a:p>
+        </p:txBody>
+      </p:sp>
+    </p:spTree>
+  </p:cSld>
+  <p:clrMapOvr>
+    <a:masterClrMapping/>
+  </p:clrMapOvr>
+</p:sld>
+</file>
+
+<file path=ppt/slides/slide50.xml><?xml version="1.0" encoding="utf-8"?>
+<p:sld xmlns:a="http://schemas.openxmlformats.org/drawingml/2006/main" xmlns:r="http://schemas.openxmlformats.org/officeDocument/2006/relationships" xmlns:p="http://schemas.openxmlformats.org/presentationml/2006/main">
+  <p:cSld name="Slide 50">
+    <p:spTree>
+      <p:nvGrpSpPr>
+        <p:cNvPr id="1" name=""/>
+        <p:cNvGrpSpPr/>
+        <p:nvPr/>
+      </p:nvGrpSpPr>
+      <p:grpSpPr>
+        <a:xfrm>
+          <a:off x="0" y="0"/>
+          <a:ext cx="0" cy="0"/>
+          <a:chOff x="0" y="0"/>
+          <a:chExt cx="0" cy="0"/>
+        </a:xfrm>
+      </p:grpSpPr>
+      <p:sp>
+        <p:nvSpPr>
+          <p:cNvPr id="2" name="Text 0"/>
+          <p:cNvSpPr/>
+          <p:nvPr/>
+        </p:nvSpPr>
+        <p:spPr>
+          <a:xfrm>
+            <a:off x="457200" y="713232"/>
+            <a:ext cx="11368735" cy="274320"/>
+          </a:xfrm>
+          <a:prstGeom prst="rect">
+            <a:avLst/>
+          </a:prstGeom>
+          <a:noFill/>
+          <a:ln/>
+        </p:spPr>
+        <p:txBody>
+          <a:bodyPr wrap="square" lIns="0" tIns="0" rIns="0" bIns="0" rtlCol="0" anchor="ctr"/>
+          <a:lstStyle/>
+          <a:p>
+            <a:pPr algn="r" indent="0" marL="0">
+              <a:buNone/>
+            </a:pPr>
+            <a:r>
+              <a:rPr lang="en-US" sz="1400" b="1" dirty="0">
+                <a:solidFill>
+                  <a:srgbClr val="1C3F6E"/>
+                </a:solidFill>
+                <a:latin typeface="Calibri" pitchFamily="34" charset="0"/>
+                <a:ea typeface="Calibri" pitchFamily="34" charset="-122"/>
+                <a:cs typeface="Calibri" pitchFamily="34" charset="-120"/>
+              </a:rPr>
               <a:t>LOGBOOK</a:t>
             </a:r>
             <a:endParaRPr lang="en-US" sz="1400" dirty="0"/>
@@ -18062,7 +19029,7 @@
       </p:sp>
       <p:graphicFrame>
         <p:nvGraphicFramePr>
-          <p:cNvPr id="49" name="Table 0"/>
+          <p:cNvPr id="51" name="Table 0"/>
           <p:cNvGraphicFramePr>
             <a:graphicFrameLocks noGrp="1"/>
           </p:cNvGraphicFramePr>
@@ -18684,7 +19651,7 @@
             <a:pPr algn="ctr"/>
             <a:fld id="{F7021451-1387-4CA6-816F-3879F97B5CBC}" type="slidenum">
               <a:rPr b="1" lang="en-US"/>
-              <a:t>48</a:t>
+              <a:t>50</a:t>
             </a:fld>
             <a:endParaRPr lang="en-US"/>
           </a:p>
@@ -18698,9 +19665,9 @@
 </p:sld>
 </file>
 
-<file path=ppt/slides/slide49.xml><?xml version="1.0" encoding="utf-8"?>
+<file path=ppt/slides/slide51.xml><?xml version="1.0" encoding="utf-8"?>
 <p:sld xmlns:a="http://schemas.openxmlformats.org/drawingml/2006/main" xmlns:r="http://schemas.openxmlformats.org/officeDocument/2006/relationships" xmlns:p="http://schemas.openxmlformats.org/presentationml/2006/main">
-  <p:cSld name="Slide 49">
+  <p:cSld name="Slide 51">
     <p:spTree>
       <p:nvGrpSpPr>
         <p:cNvPr id="1" name=""/>
@@ -18795,7 +19762,7 @@
       </p:sp>
       <p:graphicFrame>
         <p:nvGraphicFramePr>
-          <p:cNvPr id="50" name="Table 0"/>
+          <p:cNvPr id="52" name="Table 0"/>
           <p:cNvGraphicFramePr>
             <a:graphicFrameLocks noGrp="1"/>
           </p:cNvGraphicFramePr>
@@ -18905,7 +19872,7 @@
                           <a:ea typeface="Calibri" pitchFamily="34" charset="-122"/>
                           <a:cs typeface="Calibri" pitchFamily="34" charset="-120"/>
                         </a:rPr>
-                        <a:t>Types of Farming; Characteristics of Temperate Farming.</a:t>
+                        <a:t>DEFINITIONS; Farming in the Temperate Region.</a:t>
                       </a:r>
                       <a:endParaRPr lang="en-US" sz="1600" dirty="0">
                         <a:latin typeface="Calibri" charset="0"/>
@@ -19555,7 +20522,7 @@
             <a:pPr algn="ctr"/>
             <a:fld id="{F7021451-1387-4CA6-816F-3879F97B5CBC}" type="slidenum">
               <a:rPr b="1" lang="en-US"/>
-              <a:t>49</a:t>
+              <a:t>51</a:t>
             </a:fld>
             <a:endParaRPr lang="en-US"/>
           </a:p>
@@ -19569,9 +20536,9 @@
 </p:sld>
 </file>
 
-<file path=ppt/slides/slide5.xml><?xml version="1.0" encoding="utf-8"?>
+<file path=ppt/slides/slide52.xml><?xml version="1.0" encoding="utf-8"?>
 <p:sld xmlns:a="http://schemas.openxmlformats.org/drawingml/2006/main" xmlns:r="http://schemas.openxmlformats.org/officeDocument/2006/relationships" xmlns:p="http://schemas.openxmlformats.org/presentationml/2006/main">
-  <p:cSld name="Slide 5">
+  <p:cSld name="Slide 52">
     <p:spTree>
       <p:nvGrpSpPr>
         <p:cNvPr id="1" name=""/>
@@ -19619,7 +20586,7 @@
                 <a:ea typeface="Calibri" pitchFamily="34" charset="-122"/>
                 <a:cs typeface="Calibri" pitchFamily="34" charset="-120"/>
               </a:rPr>
-              <a:t>HOMEWORK CORRECTION</a:t>
+              <a:t>TEACHER'S NOTE</a:t>
             </a:r>
             <a:endParaRPr lang="en-US" sz="1400" dirty="0"/>
           </a:p>
@@ -19642,7 +20609,7 @@
         <p:spPr>
           <a:xfrm>
             <a:off x="0" y="658368"/>
-            <a:ext cx="5120640" cy="5833872"/>
+            <a:ext cx="3840480" cy="5833872"/>
           </a:xfrm>
           <a:prstGeom prst="rect">
             <a:avLst/>
@@ -19657,8 +20624,8 @@
         </p:nvSpPr>
         <p:spPr>
           <a:xfrm>
-            <a:off x="5349240" y="1005840"/>
-            <a:ext cx="6522415" cy="731520"/>
+            <a:off x="4069080" y="1005840"/>
+            <a:ext cx="7802575" cy="731520"/>
           </a:xfrm>
           <a:prstGeom prst="rect">
             <a:avLst/>
@@ -19684,7 +20651,7 @@
                 <a:ea typeface="Times New Roman" pitchFamily="34" charset="-122"/>
                 <a:cs typeface="Times New Roman" pitchFamily="34" charset="-120"/>
               </a:rPr>
-              <a:t>Correction: Possible Answer</a:t>
+              <a:t>Teacher's Note</a:t>
             </a:r>
             <a:endParaRPr lang="en-US" sz="3600" dirty="0"/>
           </a:p>
@@ -19698,8 +20665,8 @@
         </p:nvSpPr>
         <p:spPr>
           <a:xfrm>
-            <a:off x="5349240" y="1783080"/>
-            <a:ext cx="6522415" cy="4663440"/>
+            <a:off x="4069080" y="1783080"/>
+            <a:ext cx="7802575" cy="4663440"/>
           </a:xfrm>
           <a:prstGeom prst="rect">
             <a:avLst/>
@@ -19711,24 +20678,130 @@
           <a:bodyPr wrap="square" lIns="0" tIns="0" rIns="0" bIns="0" rtlCol="0" anchor="t"/>
           <a:lstStyle/>
           <a:p>
-            <a:pPr algn="l" indent="0" marL="0">
+            <a:pPr algn="l" marL="342900" indent="-342900">
               <a:spcAft>
                 <a:spcPts val="800"/>
               </a:spcAft>
-              <a:buNone/>
+              <a:buSzPct val="100000"/>
+              <a:buChar char="•"/>
             </a:pPr>
             <a:r>
-              <a:rPr lang="en-US" sz="4000" dirty="0">
+              <a:rPr lang="en-US" sz="2000" dirty="0">
                 <a:solidFill>
                   <a:srgbClr val="111111"/>
                 </a:solidFill>
-                <a:latin typeface="Times New Roman" pitchFamily="34" charset="0"/>
-                <a:ea typeface="Times New Roman" pitchFamily="34" charset="-122"/>
-                <a:cs typeface="Times New Roman" pitchFamily="34" charset="-120"/>
+                <a:latin typeface="Calibri" pitchFamily="34" charset="0"/>
+                <a:ea typeface="Calibri" pitchFamily="34" charset="-122"/>
+                <a:cs typeface="Calibri" pitchFamily="34" charset="-120"/>
               </a:rPr>
-              <a:t>Examples: wheat flour (from France or Canada), powdered milk (from Europe), apples (from France or South Africa), frozen chicken and onions (from Europe).</a:t>
-            </a:r>
-            <a:endParaRPr lang="en-US" sz="4000" dirty="0"/>
+              <a:t>Timing: Homework correction, plan, objectives 8 min | Recall, situation, action 10 min | 5 activities 30 min | Board summary (copying) 30 min | Evaluation, remediation 10 min | Homework, next lesson 5 min | Logbook 7 min</a:t>
+            </a:r>
+            <a:endParaRPr lang="en-US" sz="2000" dirty="0"/>
+          </a:p>
+          <a:p>
+            <a:pPr algn="l" marL="342900" indent="-342900">
+              <a:spcAft>
+                <a:spcPts val="800"/>
+              </a:spcAft>
+              <a:buSzPct val="100000"/>
+              <a:buChar char="•"/>
+            </a:pPr>
+            <a:r>
+              <a:rPr lang="en-US" sz="2000" dirty="0">
+                <a:solidFill>
+                  <a:srgbClr val="111111"/>
+                </a:solidFill>
+                <a:latin typeface="Calibri" pitchFamily="34" charset="0"/>
+                <a:ea typeface="Calibri" pitchFamily="34" charset="-122"/>
+                <a:cs typeface="Calibri" pitchFamily="34" charset="-120"/>
+              </a:rPr>
+              <a:t>Without the projector (Activity 1): describe a farm with crops and animals.</a:t>
+            </a:r>
+            <a:endParaRPr lang="en-US" sz="2000" dirty="0"/>
+          </a:p>
+          <a:p>
+            <a:pPr algn="l" marL="342900" indent="-342900">
+              <a:spcAft>
+                <a:spcPts val="800"/>
+              </a:spcAft>
+              <a:buSzPct val="100000"/>
+              <a:buChar char="•"/>
+            </a:pPr>
+            <a:r>
+              <a:rPr lang="en-US" sz="2000" dirty="0">
+                <a:solidFill>
+                  <a:srgbClr val="111111"/>
+                </a:solidFill>
+                <a:latin typeface="Calibri" pitchFamily="34" charset="0"/>
+                <a:ea typeface="Calibri" pitchFamily="34" charset="-122"/>
+                <a:cs typeface="Calibri" pitchFamily="34" charset="-120"/>
+              </a:rPr>
+              <a:t>Without the projector (Activity 2): name milk products.</a:t>
+            </a:r>
+            <a:endParaRPr lang="en-US" sz="2000" dirty="0"/>
+          </a:p>
+          <a:p>
+            <a:pPr algn="l" marL="342900" indent="-342900">
+              <a:spcAft>
+                <a:spcPts val="800"/>
+              </a:spcAft>
+              <a:buSzPct val="100000"/>
+              <a:buChar char="•"/>
+            </a:pPr>
+            <a:r>
+              <a:rPr lang="en-US" sz="2000" dirty="0">
+                <a:solidFill>
+                  <a:srgbClr val="111111"/>
+                </a:solidFill>
+                <a:latin typeface="Calibri" pitchFamily="34" charset="0"/>
+                <a:ea typeface="Calibri" pitchFamily="34" charset="-122"/>
+                <a:cs typeface="Calibri" pitchFamily="34" charset="-120"/>
+              </a:rPr>
+              <a:t>Without the projector (Activity 3): compare with a hoe.</a:t>
+            </a:r>
+            <a:endParaRPr lang="en-US" sz="2000" dirty="0"/>
+          </a:p>
+          <a:p>
+            <a:pPr algn="l" marL="342900" indent="-342900">
+              <a:spcAft>
+                <a:spcPts val="800"/>
+              </a:spcAft>
+              <a:buSzPct val="100000"/>
+              <a:buChar char="•"/>
+            </a:pPr>
+            <a:r>
+              <a:rPr lang="en-US" sz="2000" dirty="0">
+                <a:solidFill>
+                  <a:srgbClr val="111111"/>
+                </a:solidFill>
+                <a:latin typeface="Calibri" pitchFamily="34" charset="0"/>
+                <a:ea typeface="Calibri" pitchFamily="34" charset="-122"/>
+                <a:cs typeface="Calibri" pitchFamily="34" charset="-120"/>
+              </a:rPr>
+              <a:t>Without the projector (Activity 4): compare with herding in the North.</a:t>
+            </a:r>
+            <a:endParaRPr lang="en-US" sz="2000" dirty="0"/>
+          </a:p>
+          <a:p>
+            <a:pPr algn="l" marL="342900" indent="-342900">
+              <a:spcAft>
+                <a:spcPts val="800"/>
+              </a:spcAft>
+              <a:buSzPct val="100000"/>
+              <a:buChar char="•"/>
+            </a:pPr>
+            <a:r>
+              <a:rPr lang="en-US" sz="2000" dirty="0">
+                <a:solidFill>
+                  <a:srgbClr val="111111"/>
+                </a:solidFill>
+                <a:latin typeface="Calibri" pitchFamily="34" charset="0"/>
+                <a:ea typeface="Calibri" pitchFamily="34" charset="-122"/>
+                <a:cs typeface="Calibri" pitchFamily="34" charset="-120"/>
+              </a:rPr>
+              <a:t>Without the projector (Activity 5): name fruits from Europe.</a:t>
+            </a:r>
+            <a:endParaRPr lang="en-US" sz="2000" dirty="0"/>
           </a:p>
         </p:txBody>
       </p:sp>
@@ -19774,7 +20847,7 @@
             <a:pPr algn="ctr"/>
             <a:fld id="{F7021451-1387-4CA6-816F-3879F97B5CBC}" type="slidenum">
               <a:rPr b="1" lang="en-US"/>
-              <a:t>5</a:t>
+              <a:t>52</a:t>
             </a:fld>
             <a:endParaRPr lang="en-US"/>
           </a:p>
@@ -19788,9 +20861,9 @@
 </p:sld>
 </file>
 
-<file path=ppt/slides/slide50.xml><?xml version="1.0" encoding="utf-8"?>
+<file path=ppt/slides/slide53.xml><?xml version="1.0" encoding="utf-8"?>
 <p:sld xmlns:a="http://schemas.openxmlformats.org/drawingml/2006/main" xmlns:r="http://schemas.openxmlformats.org/officeDocument/2006/relationships" xmlns:p="http://schemas.openxmlformats.org/presentationml/2006/main">
-  <p:cSld name="Slide 50">
+  <p:cSld name="Slide 53">
     <p:spTree>
       <p:nvGrpSpPr>
         <p:cNvPr id="1" name=""/>
@@ -19838,7 +20911,7 @@
                 <a:ea typeface="Calibri" pitchFamily="34" charset="-122"/>
                 <a:cs typeface="Calibri" pitchFamily="34" charset="-120"/>
               </a:rPr>
-              <a:t>TEACHER'S NOTE</a:t>
+              <a:t>REFERENCES</a:t>
             </a:r>
             <a:endParaRPr lang="en-US" sz="1400" dirty="0"/>
           </a:p>
@@ -19861,7 +20934,7 @@
         <p:spPr>
           <a:xfrm>
             <a:off x="0" y="658368"/>
-            <a:ext cx="3840480" cy="5833872"/>
+            <a:ext cx="1463040" cy="5833872"/>
           </a:xfrm>
           <a:prstGeom prst="rect">
             <a:avLst/>
@@ -19876,8 +20949,8 @@
         </p:nvSpPr>
         <p:spPr>
           <a:xfrm>
-            <a:off x="4069080" y="1005840"/>
-            <a:ext cx="7802575" cy="731520"/>
+            <a:off x="1691640" y="1005840"/>
+            <a:ext cx="10180015" cy="731520"/>
           </a:xfrm>
           <a:prstGeom prst="rect">
             <a:avLst/>
@@ -19903,7 +20976,7 @@
                 <a:ea typeface="Times New Roman" pitchFamily="34" charset="-122"/>
                 <a:cs typeface="Times New Roman" pitchFamily="34" charset="-120"/>
               </a:rPr>
-              <a:t>Teacher's Note</a:t>
+              <a:t>References</a:t>
             </a:r>
             <a:endParaRPr lang="en-US" sz="3600" dirty="0"/>
           </a:p>
@@ -19917,8 +20990,8 @@
         </p:nvSpPr>
         <p:spPr>
           <a:xfrm>
-            <a:off x="4069080" y="1783080"/>
-            <a:ext cx="7802575" cy="4663440"/>
+            <a:off x="1691640" y="1783080"/>
+            <a:ext cx="10180015" cy="4663440"/>
           </a:xfrm>
           <a:prstGeom prst="rect">
             <a:avLst/>
@@ -19938,7 +21011,7 @@
               <a:buChar char="•"/>
             </a:pPr>
             <a:r>
-              <a:rPr lang="en-US" sz="2000" dirty="0">
+              <a:rPr lang="en-US" sz="1800" dirty="0">
                 <a:solidFill>
                   <a:srgbClr val="111111"/>
                 </a:solidFill>
@@ -19946,9 +21019,9 @@
                 <a:ea typeface="Calibri" pitchFamily="34" charset="-122"/>
                 <a:cs typeface="Calibri" pitchFamily="34" charset="-120"/>
               </a:rPr>
-              <a:t>Timing: Homework correction, plan, objectives 8 min | Recall, situation, action 10 min | 5 activities 30 min | Board summary (copying) 30 min | Evaluation, remediation 10 min | Homework, next lesson 5 min | Logbook 7 min</a:t>
-            </a:r>
-            <a:endParaRPr lang="en-US" sz="2000" dirty="0"/>
+              <a:t>Harmonised Progression Sheet, Economic Geography (5051), Form 2.</a:t>
+            </a:r>
+            <a:endParaRPr lang="en-US" sz="1800" dirty="0"/>
           </a:p>
           <a:p>
             <a:pPr algn="l" marL="342900" indent="-342900">
@@ -19959,7 +21032,7 @@
               <a:buChar char="•"/>
             </a:pPr>
             <a:r>
-              <a:rPr lang="en-US" sz="2000" dirty="0">
+              <a:rPr lang="en-US" sz="1800" dirty="0">
                 <a:solidFill>
                   <a:srgbClr val="111111"/>
                 </a:solidFill>
@@ -19967,9 +21040,9 @@
                 <a:ea typeface="Calibri" pitchFamily="34" charset="-122"/>
                 <a:cs typeface="Calibri" pitchFamily="34" charset="-120"/>
               </a:rPr>
-              <a:t>Without the projector (Activity 1): ask learners if their family grows crops and keeps animals too.</a:t>
-            </a:r>
-            <a:endParaRPr lang="en-US" sz="2000" dirty="0"/>
+              <a:t>Class textbook: The major biomes of the world (temperate regions).</a:t>
+            </a:r>
+            <a:endParaRPr lang="en-US" sz="1800" dirty="0"/>
           </a:p>
           <a:p>
             <a:pPr algn="l" marL="342900" indent="-342900">
@@ -19980,7 +21053,7 @@
               <a:buChar char="•"/>
             </a:pPr>
             <a:r>
-              <a:rPr lang="en-US" sz="2000" dirty="0">
+              <a:rPr lang="en-US" sz="1800" dirty="0">
                 <a:solidFill>
                   <a:srgbClr val="111111"/>
                 </a:solidFill>
@@ -19988,9 +21061,9 @@
                 <a:ea typeface="Calibri" pitchFamily="34" charset="-122"/>
                 <a:cs typeface="Calibri" pitchFamily="34" charset="-120"/>
               </a:rPr>
-              <a:t>Without the projector (Activity 2): show a tin of powdered milk.</a:t>
-            </a:r>
-            <a:endParaRPr lang="en-US" sz="2000" dirty="0"/>
+              <a:t>Photo, Activity 1: “Timid” by tricky (rick harrison), CC BY-NC-SA 2.0, via Flickr (https://www.flickr.com/photos/81851211@N00/205287304)</a:t>
+            </a:r>
+            <a:endParaRPr lang="en-US" sz="1800" dirty="0"/>
           </a:p>
           <a:p>
             <a:pPr algn="l" marL="342900" indent="-342900">
@@ -20001,7 +21074,7 @@
               <a:buChar char="•"/>
             </a:pPr>
             <a:r>
-              <a:rPr lang="en-US" sz="2000" dirty="0">
+              <a:rPr lang="en-US" sz="1800" dirty="0">
                 <a:solidFill>
                   <a:srgbClr val="111111"/>
                 </a:solidFill>
@@ -20009,9 +21082,9 @@
                 <a:ea typeface="Calibri" pitchFamily="34" charset="-122"/>
                 <a:cs typeface="Calibri" pitchFamily="34" charset="-120"/>
               </a:rPr>
-              <a:t>Without the projector (Activity 3): compare with a farmer who harvests sorghum by hand.</a:t>
-            </a:r>
-            <a:endParaRPr lang="en-US" sz="2000" dirty="0"/>
+              <a:t>Photo, Activity 2: “Koe 9354” by ednl, CC BY 2.0, via Flickr (https://www.flickr.com/photos/31392863@N04/5640329871)</a:t>
+            </a:r>
+            <a:endParaRPr lang="en-US" sz="1800" dirty="0"/>
           </a:p>
           <a:p>
             <a:pPr algn="l" marL="342900" indent="-342900">
@@ -20022,7 +21095,7 @@
               <a:buChar char="•"/>
             </a:pPr>
             <a:r>
-              <a:rPr lang="en-US" sz="2000" dirty="0">
+              <a:rPr lang="en-US" sz="1800" dirty="0">
                 <a:solidFill>
                   <a:srgbClr val="111111"/>
                 </a:solidFill>
@@ -20030,9 +21103,9 @@
                 <a:ea typeface="Calibri" pitchFamily="34" charset="-122"/>
                 <a:cs typeface="Calibri" pitchFamily="34" charset="-120"/>
               </a:rPr>
-              <a:t>Without the projector (Activity 4): compare with the ranches of the Adamawa plateau.</a:t>
-            </a:r>
-            <a:endParaRPr lang="en-US" sz="2000" dirty="0"/>
+              <a:t>Photo, Activity 3: “John Deere Combine” by SnoShuu, CC BY-NC-ND 2.0, via Flickr (https://www.flickr.com/photos/85888233@N00/2776467094)</a:t>
+            </a:r>
+            <a:endParaRPr lang="en-US" sz="1800" dirty="0"/>
           </a:p>
           <a:p>
             <a:pPr algn="l" marL="342900" indent="-342900">
@@ -20043,7 +21116,7 @@
               <a:buChar char="•"/>
             </a:pPr>
             <a:r>
-              <a:rPr lang="en-US" sz="2000" dirty="0">
+              <a:rPr lang="en-US" sz="1800" dirty="0">
                 <a:solidFill>
                   <a:srgbClr val="111111"/>
                 </a:solidFill>
@@ -20051,9 +21124,51 @@
                 <a:ea typeface="Calibri" pitchFamily="34" charset="-122"/>
                 <a:cs typeface="Calibri" pitchFamily="34" charset="-120"/>
               </a:rPr>
-              <a:t>Without the projector (Activity 5): ask learners where oranges in the market come from.</a:t>
-            </a:r>
-            <a:endParaRPr lang="en-US" sz="2000" dirty="0"/>
+              <a:t>Photo, Activity 4: “The Flock” by seefit, CC BY 2.0, via Flickr (https://www.flickr.com/photos/76574551@N00/20928299362)</a:t>
+            </a:r>
+            <a:endParaRPr lang="en-US" sz="1800" dirty="0"/>
+          </a:p>
+          <a:p>
+            <a:pPr algn="l" marL="342900" indent="-342900">
+              <a:spcAft>
+                <a:spcPts val="800"/>
+              </a:spcAft>
+              <a:buSzPct val="100000"/>
+              <a:buChar char="•"/>
+            </a:pPr>
+            <a:r>
+              <a:rPr lang="en-US" sz="1800" dirty="0">
+                <a:solidFill>
+                  <a:srgbClr val="111111"/>
+                </a:solidFill>
+                <a:latin typeface="Calibri" pitchFamily="34" charset="0"/>
+                <a:ea typeface="Calibri" pitchFamily="34" charset="-122"/>
+                <a:cs typeface="Calibri" pitchFamily="34" charset="-120"/>
+              </a:rPr>
+              <a:t>Photo, Activity 5: “Stefano Lubiana Wines Tasmania harvest panorama” by stefano lubiana wines, CC BY 2.0, via Flickr (https://www.flickr.com/photos/50979249@N06/4688372740)</a:t>
+            </a:r>
+            <a:endParaRPr lang="en-US" sz="1800" dirty="0"/>
+          </a:p>
+          <a:p>
+            <a:pPr algn="l" marL="342900" indent="-342900">
+              <a:spcAft>
+                <a:spcPts val="800"/>
+              </a:spcAft>
+              <a:buSzPct val="100000"/>
+              <a:buChar char="•"/>
+            </a:pPr>
+            <a:r>
+              <a:rPr lang="en-US" sz="1800" dirty="0">
+                <a:solidFill>
+                  <a:srgbClr val="111111"/>
+                </a:solidFill>
+                <a:latin typeface="Calibri" pitchFamily="34" charset="0"/>
+                <a:ea typeface="Calibri" pitchFamily="34" charset="-122"/>
+                <a:cs typeface="Calibri" pitchFamily="34" charset="-120"/>
+              </a:rPr>
+              <a:t>Diagrams and animations: drawn for this lesson (Geography Department).</a:t>
+            </a:r>
+            <a:endParaRPr lang="en-US" sz="1800" dirty="0"/>
           </a:p>
         </p:txBody>
       </p:sp>
@@ -20099,374 +21214,7 @@
             <a:pPr algn="ctr"/>
             <a:fld id="{F7021451-1387-4CA6-816F-3879F97B5CBC}" type="slidenum">
               <a:rPr b="1" lang="en-US"/>
-              <a:t>50</a:t>
-            </a:fld>
-            <a:endParaRPr lang="en-US"/>
-          </a:p>
-        </p:txBody>
-      </p:sp>
-    </p:spTree>
-  </p:cSld>
-  <p:clrMapOvr>
-    <a:masterClrMapping/>
-  </p:clrMapOvr>
-</p:sld>
-</file>
-
-<file path=ppt/slides/slide51.xml><?xml version="1.0" encoding="utf-8"?>
-<p:sld xmlns:a="http://schemas.openxmlformats.org/drawingml/2006/main" xmlns:r="http://schemas.openxmlformats.org/officeDocument/2006/relationships" xmlns:p="http://schemas.openxmlformats.org/presentationml/2006/main">
-  <p:cSld name="Slide 51">
-    <p:spTree>
-      <p:nvGrpSpPr>
-        <p:cNvPr id="1" name=""/>
-        <p:cNvGrpSpPr/>
-        <p:nvPr/>
-      </p:nvGrpSpPr>
-      <p:grpSpPr>
-        <a:xfrm>
-          <a:off x="0" y="0"/>
-          <a:ext cx="0" cy="0"/>
-          <a:chOff x="0" y="0"/>
-          <a:chExt cx="0" cy="0"/>
-        </a:xfrm>
-      </p:grpSpPr>
-      <p:sp>
-        <p:nvSpPr>
-          <p:cNvPr id="2" name="Text 0"/>
-          <p:cNvSpPr/>
-          <p:nvPr/>
-        </p:nvSpPr>
-        <p:spPr>
-          <a:xfrm>
-            <a:off x="457200" y="713232"/>
-            <a:ext cx="11368735" cy="274320"/>
-          </a:xfrm>
-          <a:prstGeom prst="rect">
-            <a:avLst/>
-          </a:prstGeom>
-          <a:noFill/>
-          <a:ln/>
-        </p:spPr>
-        <p:txBody>
-          <a:bodyPr wrap="square" lIns="0" tIns="0" rIns="0" bIns="0" rtlCol="0" anchor="ctr"/>
-          <a:lstStyle/>
-          <a:p>
-            <a:pPr algn="r" indent="0" marL="0">
-              <a:buNone/>
-            </a:pPr>
-            <a:r>
-              <a:rPr lang="en-US" sz="1400" b="1" dirty="0">
-                <a:solidFill>
-                  <a:srgbClr val="1C3F6E"/>
-                </a:solidFill>
-                <a:latin typeface="Calibri" pitchFamily="34" charset="0"/>
-                <a:ea typeface="Calibri" pitchFamily="34" charset="-122"/>
-                <a:cs typeface="Calibri" pitchFamily="34" charset="-120"/>
-              </a:rPr>
-              <a:t>REFERENCES</a:t>
-            </a:r>
-            <a:endParaRPr lang="en-US" sz="1400" dirty="0"/>
-          </a:p>
-        </p:txBody>
-      </p:sp>
-      <p:pic>
-        <p:nvPicPr>
-          <p:cNvPr id="3" name="Image 0" descr="/home/claude/f4/img/minesec_sheet.png">    </p:cNvPr>
-          <p:cNvPicPr>
-            <a:picLocks noChangeAspect="1"/>
-          </p:cNvPicPr>
-          <p:nvPr/>
-        </p:nvPicPr>
-        <p:blipFill>
-          <a:blip r:embed="rId1"/>
-          <a:stretch>
-            <a:fillRect/>
-          </a:stretch>
-        </p:blipFill>
-        <p:spPr>
-          <a:xfrm>
-            <a:off x="0" y="658368"/>
-            <a:ext cx="1463040" cy="5833872"/>
-          </a:xfrm>
-          <a:prstGeom prst="rect">
-            <a:avLst/>
-          </a:prstGeom>
-        </p:spPr>
-      </p:pic>
-      <p:sp>
-        <p:nvSpPr>
-          <p:cNvPr id="4" name="Text 1"/>
-          <p:cNvSpPr/>
-          <p:nvPr/>
-        </p:nvSpPr>
-        <p:spPr>
-          <a:xfrm>
-            <a:off x="1691640" y="1005840"/>
-            <a:ext cx="10180015" cy="731520"/>
-          </a:xfrm>
-          <a:prstGeom prst="rect">
-            <a:avLst/>
-          </a:prstGeom>
-          <a:noFill/>
-          <a:ln/>
-        </p:spPr>
-        <p:txBody>
-          <a:bodyPr wrap="square" lIns="0" tIns="0" rIns="0" bIns="0" rtlCol="0" anchor="ctr">
-            <a:normAutofit/>
-          </a:bodyPr>
-          <a:lstStyle/>
-          <a:p>
-            <a:pPr algn="ctr" indent="0" marL="0">
-              <a:buNone/>
-            </a:pPr>
-            <a:r>
-              <a:rPr lang="en-US" sz="3600" b="1" dirty="0">
-                <a:solidFill>
-                  <a:srgbClr val="990011"/>
-                </a:solidFill>
-                <a:latin typeface="Times New Roman" pitchFamily="34" charset="0"/>
-                <a:ea typeface="Times New Roman" pitchFamily="34" charset="-122"/>
-                <a:cs typeface="Times New Roman" pitchFamily="34" charset="-120"/>
-              </a:rPr>
-              <a:t>References</a:t>
-            </a:r>
-            <a:endParaRPr lang="en-US" sz="3600" dirty="0"/>
-          </a:p>
-        </p:txBody>
-      </p:sp>
-      <p:sp>
-        <p:nvSpPr>
-          <p:cNvPr id="5" name="Text 2"/>
-          <p:cNvSpPr/>
-          <p:nvPr/>
-        </p:nvSpPr>
-        <p:spPr>
-          <a:xfrm>
-            <a:off x="1691640" y="1783080"/>
-            <a:ext cx="10180015" cy="4663440"/>
-          </a:xfrm>
-          <a:prstGeom prst="rect">
-            <a:avLst/>
-          </a:prstGeom>
-          <a:noFill/>
-          <a:ln/>
-        </p:spPr>
-        <p:txBody>
-          <a:bodyPr wrap="square" lIns="0" tIns="0" rIns="0" bIns="0" rtlCol="0" anchor="t"/>
-          <a:lstStyle/>
-          <a:p>
-            <a:pPr algn="l" marL="342900" indent="-342900">
-              <a:spcAft>
-                <a:spcPts val="800"/>
-              </a:spcAft>
-              <a:buSzPct val="100000"/>
-              <a:buChar char="•"/>
-            </a:pPr>
-            <a:r>
-              <a:rPr lang="en-US" sz="1800" dirty="0">
-                <a:solidFill>
-                  <a:srgbClr val="111111"/>
-                </a:solidFill>
-                <a:latin typeface="Calibri" pitchFamily="34" charset="0"/>
-                <a:ea typeface="Calibri" pitchFamily="34" charset="-122"/>
-                <a:cs typeface="Calibri" pitchFamily="34" charset="-120"/>
-              </a:rPr>
-              <a:t>Harmonised Progression Sheet, Economic Geography (5051), Form 2.</a:t>
-            </a:r>
-            <a:endParaRPr lang="en-US" sz="1800" dirty="0"/>
-          </a:p>
-          <a:p>
-            <a:pPr algn="l" marL="342900" indent="-342900">
-              <a:spcAft>
-                <a:spcPts val="800"/>
-              </a:spcAft>
-              <a:buSzPct val="100000"/>
-              <a:buChar char="•"/>
-            </a:pPr>
-            <a:r>
-              <a:rPr lang="en-US" sz="1800" dirty="0">
-                <a:solidFill>
-                  <a:srgbClr val="111111"/>
-                </a:solidFill>
-                <a:latin typeface="Calibri" pitchFamily="34" charset="0"/>
-                <a:ea typeface="Calibri" pitchFamily="34" charset="-122"/>
-                <a:cs typeface="Calibri" pitchFamily="34" charset="-120"/>
-              </a:rPr>
-              <a:t>Class textbook: The major biomes of the world (temperate regions).</a:t>
-            </a:r>
-            <a:endParaRPr lang="en-US" sz="1800" dirty="0"/>
-          </a:p>
-          <a:p>
-            <a:pPr algn="l" marL="342900" indent="-342900">
-              <a:spcAft>
-                <a:spcPts val="800"/>
-              </a:spcAft>
-              <a:buSzPct val="100000"/>
-              <a:buChar char="•"/>
-            </a:pPr>
-            <a:r>
-              <a:rPr lang="en-US" sz="1800" dirty="0">
-                <a:solidFill>
-                  <a:srgbClr val="111111"/>
-                </a:solidFill>
-                <a:latin typeface="Calibri" pitchFamily="34" charset="0"/>
-                <a:ea typeface="Calibri" pitchFamily="34" charset="-122"/>
-                <a:cs typeface="Calibri" pitchFamily="34" charset="-120"/>
-              </a:rPr>
-              <a:t>Photo, Activity 1: “Timid” by tricky (rick harrison), CC BY-NC-SA 2.0, via Flickr (https://www.flickr.com/photos/81851211@N00/205287304)</a:t>
-            </a:r>
-            <a:endParaRPr lang="en-US" sz="1800" dirty="0"/>
-          </a:p>
-          <a:p>
-            <a:pPr algn="l" marL="342900" indent="-342900">
-              <a:spcAft>
-                <a:spcPts val="800"/>
-              </a:spcAft>
-              <a:buSzPct val="100000"/>
-              <a:buChar char="•"/>
-            </a:pPr>
-            <a:r>
-              <a:rPr lang="en-US" sz="1800" dirty="0">
-                <a:solidFill>
-                  <a:srgbClr val="111111"/>
-                </a:solidFill>
-                <a:latin typeface="Calibri" pitchFamily="34" charset="0"/>
-                <a:ea typeface="Calibri" pitchFamily="34" charset="-122"/>
-                <a:cs typeface="Calibri" pitchFamily="34" charset="-120"/>
-              </a:rPr>
-              <a:t>Photo, Activity 2: “Koe 9354” by ednl, CC BY 2.0, via Flickr (https://www.flickr.com/photos/31392863@N04/5640329871)</a:t>
-            </a:r>
-            <a:endParaRPr lang="en-US" sz="1800" dirty="0"/>
-          </a:p>
-          <a:p>
-            <a:pPr algn="l" marL="342900" indent="-342900">
-              <a:spcAft>
-                <a:spcPts val="800"/>
-              </a:spcAft>
-              <a:buSzPct val="100000"/>
-              <a:buChar char="•"/>
-            </a:pPr>
-            <a:r>
-              <a:rPr lang="en-US" sz="1800" dirty="0">
-                <a:solidFill>
-                  <a:srgbClr val="111111"/>
-                </a:solidFill>
-                <a:latin typeface="Calibri" pitchFamily="34" charset="0"/>
-                <a:ea typeface="Calibri" pitchFamily="34" charset="-122"/>
-                <a:cs typeface="Calibri" pitchFamily="34" charset="-120"/>
-              </a:rPr>
-              <a:t>Photo, Activity 3: “John Deere Combine” by SnoShuu, CC BY-NC-ND 2.0, via Flickr (https://www.flickr.com/photos/85888233@N00/2776467094)</a:t>
-            </a:r>
-            <a:endParaRPr lang="en-US" sz="1800" dirty="0"/>
-          </a:p>
-          <a:p>
-            <a:pPr algn="l" marL="342900" indent="-342900">
-              <a:spcAft>
-                <a:spcPts val="800"/>
-              </a:spcAft>
-              <a:buSzPct val="100000"/>
-              <a:buChar char="•"/>
-            </a:pPr>
-            <a:r>
-              <a:rPr lang="en-US" sz="1800" dirty="0">
-                <a:solidFill>
-                  <a:srgbClr val="111111"/>
-                </a:solidFill>
-                <a:latin typeface="Calibri" pitchFamily="34" charset="0"/>
-                <a:ea typeface="Calibri" pitchFamily="34" charset="-122"/>
-                <a:cs typeface="Calibri" pitchFamily="34" charset="-120"/>
-              </a:rPr>
-              <a:t>Photo, Activity 4: “The Flock” by seefit, CC BY 2.0, via Flickr (https://www.flickr.com/photos/76574551@N00/20928299362)</a:t>
-            </a:r>
-            <a:endParaRPr lang="en-US" sz="1800" dirty="0"/>
-          </a:p>
-          <a:p>
-            <a:pPr algn="l" marL="342900" indent="-342900">
-              <a:spcAft>
-                <a:spcPts val="800"/>
-              </a:spcAft>
-              <a:buSzPct val="100000"/>
-              <a:buChar char="•"/>
-            </a:pPr>
-            <a:r>
-              <a:rPr lang="en-US" sz="1800" dirty="0">
-                <a:solidFill>
-                  <a:srgbClr val="111111"/>
-                </a:solidFill>
-                <a:latin typeface="Calibri" pitchFamily="34" charset="0"/>
-                <a:ea typeface="Calibri" pitchFamily="34" charset="-122"/>
-                <a:cs typeface="Calibri" pitchFamily="34" charset="-120"/>
-              </a:rPr>
-              <a:t>Photo, Activity 5: “Stefano Lubiana Wines Tasmania harvest panorama” by stefano lubiana wines, CC BY 2.0, via Flickr (https://www.flickr.com/photos/50979249@N06/4688372740)</a:t>
-            </a:r>
-            <a:endParaRPr lang="en-US" sz="1800" dirty="0"/>
-          </a:p>
-          <a:p>
-            <a:pPr algn="l" marL="342900" indent="-342900">
-              <a:spcAft>
-                <a:spcPts val="800"/>
-              </a:spcAft>
-              <a:buSzPct val="100000"/>
-              <a:buChar char="•"/>
-            </a:pPr>
-            <a:r>
-              <a:rPr lang="en-US" sz="1800" dirty="0">
-                <a:solidFill>
-                  <a:srgbClr val="111111"/>
-                </a:solidFill>
-                <a:latin typeface="Calibri" pitchFamily="34" charset="0"/>
-                <a:ea typeface="Calibri" pitchFamily="34" charset="-122"/>
-                <a:cs typeface="Calibri" pitchFamily="34" charset="-120"/>
-              </a:rPr>
-              <a:t>Diagrams and animations: drawn for this lesson (Geography Department).</a:t>
-            </a:r>
-            <a:endParaRPr lang="en-US" sz="1800" dirty="0"/>
-          </a:p>
-        </p:txBody>
-      </p:sp>
-      <p:sp>
-        <p:nvSpPr>
-          <p:cNvPr id="25" name="Slide Number Placeholder 0"/>
-          <p:cNvSpPr>
-            <a:spLocks noGrp="1"/>
-          </p:cNvSpPr>
-          <p:nvPr>
-            <p:ph type="sldNum" sz="quarter" idx="4294967295"/>
-          </p:nvPr>
-        </p:nvSpPr>
-        <p:spPr>
-          <a:xfrm>
-            <a:off x="27432" y="91440"/>
-            <a:ext cx="585216" cy="475488"/>
-          </a:xfrm>
-          <a:prstGeom prst="rect">
-            <a:avLst/>
-          </a:prstGeom>
-          <a:extLst>
-            <a:ext uri="{C572A759-6A51-4108-AA02-DFA0A04FC94B}">
-              <ma14:wrappingTextBoxFlag xmlns:ma14="http://schemas.microsoft.com/office/mac/drawingml/2011/main" val="0"/>
-            </a:ext>
-          </a:extLst>
-        </p:spPr>
-        <p:txBody>
-          <a:bodyPr/>
-          <a:lstStyle>
-            <a:lvl1pPr>
-              <a:defRPr sz="2000">
-                <a:solidFill>
-                  <a:srgbClr val="FFFFFF"/>
-                </a:solidFill>
-                <a:latin typeface="Calibri"/>
-                <a:ea typeface="Calibri"/>
-                <a:cs typeface="Calibri"/>
-              </a:defRPr>
-            </a:lvl1pPr>
-          </a:lstStyle>
-          <a:p>
-            <a:pPr algn="ctr"/>
-            <a:fld id="{F7021451-1387-4CA6-816F-3879F97B5CBC}" type="slidenum">
-              <a:rPr b="1" lang="en-US"/>
-              <a:t>51</a:t>
+              <a:t>53</a:t>
             </a:fld>
             <a:endParaRPr lang="en-US"/>
           </a:p>

--- a/lecons/F2T/18_S12_L4_P3_Temperate_Farming.pptx
+++ b/lecons/F2T/18_S12_L4_P3_Temperate_Farming.pptx
@@ -3106,7 +3106,7 @@
           <a:p>
             <a:r>
               <a:rPr lang="en-US" dirty="0"/>
-              <a:t>Let us copy Farming in the Temperate Region. The main types of farming are the following. Copy the point on Mixed farming on the left, then draw the diagram on the right: mixed farming. Give it a title and label it clearly.</a:t>
+              <a:t>Let us copy Farming in the Temperate Region. The main types of farming and the reasons for their productivity are the following. Copy the point on Mixed farming on the left, then draw the diagram on the right: mixed farming. Give it a title and label it clearly.</a:t>
             </a:r>
             <a:endParaRPr lang="en-US" dirty="0"/>
           </a:p>
@@ -13961,7 +13961,7 @@
                 <a:ea typeface="Times New Roman" pitchFamily="34" charset="-122"/>
                 <a:cs typeface="Times New Roman" pitchFamily="34" charset="-120"/>
               </a:rPr>
-              <a:t>The main types of farming are the following:</a:t>
+              <a:t>The main types of farming and the reasons for their productivity are the following:</a:t>
             </a:r>
             <a:endParaRPr lang="en-US" sz="3600" dirty="0"/>
           </a:p>

--- a/lecons/F2T/18_S12_L4_P3_Temperate_Farming.pptx
+++ b/lecons/F2T/18_S12_L4_P3_Temperate_Farming.pptx
@@ -3458,7 +3458,7 @@
           <a:p>
             <a:r>
               <a:rPr lang="en-US" dirty="0"/>
-              <a:t>Before we start the new lesson, let us correct the homework I gave you at the end of Lesson 4 (Part 2): The Temperate Region: Characteristics (Soils and Vegetation). The question was: Find the names of three food products imported into Cameroon from temperate countries (for example wheat flour, milk or apples). Take out your exercise books.</a:t>
+              <a:t>Before we start the new lesson, let us correct the homework I gave you at the end of Lesson 4 (Part 2): The Temperate Region: Characteristics (Soils and Vegetation). The question was: Define mixed farming. Take out your exercise books.</a:t>
             </a:r>
             <a:endParaRPr lang="en-US" dirty="0"/>
           </a:p>
@@ -4162,7 +4162,7 @@
           <a:p>
             <a:r>
               <a:rPr lang="en-US" dirty="0"/>
-              <a:t>For your homework: Ask an adult who has lived or travelled in Europe what difficulties people face in winter. Write down two of them. We shall correct it at the beginning of our next lesson.</a:t>
+              <a:t>For your homework: Give two problems of the temperate region. We shall correct it at the beginning of our next lesson.</a:t>
             </a:r>
             <a:endParaRPr lang="en-US" dirty="0"/>
           </a:p>
@@ -4426,7 +4426,7 @@
           <a:p>
             <a:r>
               <a:rPr lang="en-US" dirty="0"/>
-              <a:t>Here is a good answer. Examples: wheat flour (from France or Canada), powdered milk (from Europe), apples (from France or South Africa), frozen chicken and onions (from Europe). Compare it with your own answer and correct your work in red.</a:t>
+              <a:t>Here is a good answer. It is growing crops and rearing animals on the same farm. Compare it with your own answer and correct your work in red.</a:t>
             </a:r>
             <a:endParaRPr lang="en-US" dirty="0"/>
           </a:p>
@@ -14990,7 +14990,7 @@
         <p:spPr>
           <a:xfrm>
             <a:off x="0" y="658368"/>
-            <a:ext cx="2468880" cy="5833872"/>
+            <a:ext cx="5120640" cy="5833872"/>
           </a:xfrm>
           <a:prstGeom prst="rect">
             <a:avLst/>
@@ -15005,8 +15005,8 @@
         </p:nvSpPr>
         <p:spPr>
           <a:xfrm>
-            <a:off x="2697480" y="1005840"/>
-            <a:ext cx="9174175" cy="731520"/>
+            <a:off x="5349240" y="1005840"/>
+            <a:ext cx="6522415" cy="731520"/>
           </a:xfrm>
           <a:prstGeom prst="rect">
             <a:avLst/>
@@ -15046,8 +15046,8 @@
         </p:nvSpPr>
         <p:spPr>
           <a:xfrm>
-            <a:off x="2697480" y="1783080"/>
-            <a:ext cx="9174175" cy="4663440"/>
+            <a:off x="5349240" y="1783080"/>
+            <a:ext cx="6522415" cy="4663440"/>
           </a:xfrm>
           <a:prstGeom prst="rect">
             <a:avLst/>
@@ -15094,7 +15094,7 @@
                 <a:ea typeface="Times New Roman" pitchFamily="34" charset="-122"/>
                 <a:cs typeface="Times New Roman" pitchFamily="34" charset="-120"/>
               </a:rPr>
-              <a:t>Find the names of three food products imported into Cameroon from temperate countries (for example wheat flour, milk or apples).</a:t>
+              <a:t>Define mixed farming.</a:t>
             </a:r>
             <a:endParaRPr lang="en-US" sz="4000" dirty="0"/>
           </a:p>
@@ -16989,7 +16989,7 @@
                 <a:ea typeface="Times New Roman" pitchFamily="34" charset="-122"/>
                 <a:cs typeface="Times New Roman" pitchFamily="34" charset="-120"/>
               </a:rPr>
-              <a:t>Ask an adult who has lived or travelled in Europe what difficulties people face in winter. Write down two of them.</a:t>
+              <a:t>Give two problems of the temperate region.</a:t>
             </a:r>
             <a:endParaRPr lang="en-US" sz="4000" dirty="0"/>
           </a:p>
@@ -18870,7 +18870,7 @@
                 <a:ea typeface="Times New Roman" pitchFamily="34" charset="-122"/>
                 <a:cs typeface="Times New Roman" pitchFamily="34" charset="-120"/>
               </a:rPr>
-              <a:t>Examples: wheat flour (from France or Canada), powdered milk (from Europe), apples (from France or South Africa), frozen chicken and onions (from Europe).</a:t>
+              <a:t>It is growing crops and rearing animals on the same farm.</a:t>
             </a:r>
             <a:endParaRPr lang="en-US" sz="4000" dirty="0"/>
           </a:p>
@@ -20148,7 +20148,7 @@
                           <a:ea typeface="Calibri" pitchFamily="34" charset="-122"/>
                           <a:cs typeface="Calibri" pitchFamily="34" charset="-120"/>
                         </a:rPr>
-                        <a:t>Ask an adult who has lived or travelled in Europe what difficulties people face in winter. Write down two of them.</a:t>
+                        <a:t>Give two problems of the temperate region.</a:t>
                       </a:r>
                       <a:endParaRPr lang="en-US" sz="1600" dirty="0">
                         <a:latin typeface="Calibri" charset="0"/>
